--- a/Section_03_Data_Modeling_Schema_Design_Validation/Lesson_021_Databases_Collections_Documents/ppt/Lesson_021_Databases_Collections_and_Documents.pptx
+++ b/Section_03_Data_Modeling_Schema_Design_Validation/Lesson_021_Databases_Collections_Documents/ppt/Lesson_021_Databases_Collections_and_Documents.pptx
@@ -4,6 +4,9 @@
   <p:sldMasterIdLst>
     <p:sldMasterId id="2147483648" r:id="rId1"/>
   </p:sldMasterIdLst>
+  <p:notesMasterIdLst>
+    <p:notesMasterId r:id="rId13"/>
+  </p:notesMasterIdLst>
   <p:sldIdLst>
     <p:sldId id="256" r:id="rId2"/>
     <p:sldId id="257" r:id="rId3"/>
@@ -17,9 +20,6 @@
     <p:sldId id="265" r:id="rId11"/>
     <p:sldId id="266" r:id="rId12"/>
   </p:sldIdLst>
-  <p:notesMasterIdLst>
-    <p:notesMasterId r:id="rId13"/>
-  </p:notesMasterIdLst>
   <p:sldSz cx="12192000" cy="6858000"/>
   <p:notesSz cx="6858000" cy="12192000"/>
   <p:defaultTextStyle>
@@ -114,6 +114,11 @@
       </a:defRPr>
     </a:lvl9pPr>
   </p:defaultTextStyle>
+  <p:extLst>
+    <p:ext uri="{EFAFB233-063F-42B5-8137-9DF3F51BA10A}">
+      <p15:sldGuideLst xmlns:p15="http://schemas.microsoft.com/office/powerpoint/2012/main"/>
+    </p:ext>
+  </p:extLst>
 </p:presentation>
 </file>
 
@@ -139,234 +144,10 @@
           <a:chExt cx="0" cy="0"/>
         </a:xfrm>
       </p:grpSpPr>
-      <p:sp>
-        <p:nvSpPr>
-          <p:cNvPr id="2" name="Header Placeholder 1"/>
-          <p:cNvSpPr>
-            <a:spLocks noGrp="1"/>
-          </p:cNvSpPr>
-          <p:nvPr>
-            <p:ph type="hdr" sz="quarter"/>
-          </p:nvPr>
-        </p:nvSpPr>
-        <p:spPr>
-          <a:xfrm>
-            <a:off x="0" y="0"/>
-            <a:ext cx="2971800" cy="458788"/>
-          </a:xfrm>
-          <a:prstGeom prst="rect">
-            <a:avLst/>
-          </a:prstGeom>
-        </p:spPr>
-        <p:txBody>
-          <a:bodyPr vert="horz" lIns="91440" tIns="45720" rIns="91440" bIns="45720" rtlCol="0"/>
-          <a:lstStyle>
-            <a:lvl1pPr algn="l">
-              <a:defRPr sz="1200"/>
-            </a:lvl1pPr>
-          </a:lstStyle>
-          <a:p>
-            <a:endParaRPr lang="en-US"/>
-          </a:p>
-        </p:txBody>
-      </p:sp>
-      <p:sp>
-        <p:nvSpPr>
-          <p:cNvPr id="3" name="Date Placeholder 2"/>
-          <p:cNvSpPr>
-            <a:spLocks noGrp="1"/>
-          </p:cNvSpPr>
-          <p:nvPr>
-            <p:ph type="dt" idx="1"/>
-          </p:nvPr>
-        </p:nvSpPr>
-        <p:spPr>
-          <a:xfrm>
-            <a:off x="3884613" y="0"/>
-            <a:ext cx="2971800" cy="458788"/>
-          </a:xfrm>
-          <a:prstGeom prst="rect">
-            <a:avLst/>
-          </a:prstGeom>
-        </p:spPr>
-        <p:txBody>
-          <a:bodyPr vert="horz" lIns="91440" tIns="45720" rIns="91440" bIns="45720" rtlCol="0"/>
-          <a:lstStyle>
-            <a:lvl1pPr algn="r">
-              <a:defRPr sz="1200"/>
-            </a:lvl1pPr>
-          </a:lstStyle>
-          <a:p>
-            <a:fld id="{5282F153-3F37-0F45-9E97-73ACFA13230C}" type="datetimeFigureOut">
-              <a:rPr lang="en-US"/>
-              <a:t>7/23/19</a:t>
-            </a:fld>
-            <a:endParaRPr lang="en-US"/>
-          </a:p>
-        </p:txBody>
-      </p:sp>
-      <p:sp>
-        <p:nvSpPr>
-          <p:cNvPr id="4" name="Slide Image Placeholder 3"/>
-          <p:cNvSpPr>
-            <a:spLocks noGrp="1" noRot="1" noChangeAspect="1"/>
-          </p:cNvSpPr>
-          <p:nvPr>
-            <p:ph type="sldImg" idx="2"/>
-          </p:nvPr>
-        </p:nvSpPr>
-        <p:spPr>
-          <a:xfrm>
-            <a:off x="685800" y="1143000"/>
-            <a:ext cx="5486400" cy="3086100"/>
-          </a:xfrm>
-          <a:prstGeom prst="rect">
-            <a:avLst/>
-          </a:prstGeom>
-          <a:noFill/>
-          <a:ln w="12700">
-            <a:solidFill>
-              <a:prstClr val="black"/>
-            </a:solidFill>
-          </a:ln>
-        </p:spPr>
-        <p:txBody>
-          <a:bodyPr vert="horz" lIns="91440" tIns="45720" rIns="91440" bIns="45720" rtlCol="0" anchor="ctr"/>
-          <a:lstStyle/>
-          <a:p>
-            <a:endParaRPr lang="en-US"/>
-          </a:p>
-        </p:txBody>
-      </p:sp>
-      <p:sp>
-        <p:nvSpPr>
-          <p:cNvPr id="5" name="Notes Placeholder 4"/>
-          <p:cNvSpPr>
-            <a:spLocks noGrp="1"/>
-          </p:cNvSpPr>
-          <p:nvPr>
-            <p:ph type="body" sz="quarter" idx="3"/>
-          </p:nvPr>
-        </p:nvSpPr>
-        <p:spPr>
-          <a:xfrm>
-            <a:off x="685800" y="4400550"/>
-            <a:ext cx="5486400" cy="3600450"/>
-          </a:xfrm>
-          <a:prstGeom prst="rect">
-            <a:avLst/>
-          </a:prstGeom>
-        </p:spPr>
-        <p:txBody>
-          <a:bodyPr vert="horz" lIns="91440" tIns="45720" rIns="91440" bIns="45720" rtlCol="0"/>
-          <a:lstStyle/>
-          <a:p>
-            <a:pPr lvl="0"/>
-            <a:r>
-              <a:rPr lang="en-US"/>
-              <a:t>Click to edit Master text styles</a:t>
-            </a:r>
-          </a:p>
-          <a:p>
-            <a:pPr lvl="1"/>
-            <a:r>
-              <a:rPr lang="en-US"/>
-              <a:t>Second level</a:t>
-            </a:r>
-          </a:p>
-          <a:p>
-            <a:pPr lvl="2"/>
-            <a:r>
-              <a:rPr lang="en-US"/>
-              <a:t>Third level</a:t>
-            </a:r>
-          </a:p>
-          <a:p>
-            <a:pPr lvl="3"/>
-            <a:r>
-              <a:rPr lang="en-US"/>
-              <a:t>Fourth level</a:t>
-            </a:r>
-          </a:p>
-          <a:p>
-            <a:pPr lvl="4"/>
-            <a:r>
-              <a:rPr lang="en-US"/>
-              <a:t>Fifth level</a:t>
-            </a:r>
-          </a:p>
-        </p:txBody>
-      </p:sp>
-      <p:sp>
-        <p:nvSpPr>
-          <p:cNvPr id="6" name="Footer Placeholder 5"/>
-          <p:cNvSpPr>
-            <a:spLocks noGrp="1"/>
-          </p:cNvSpPr>
-          <p:nvPr>
-            <p:ph type="ftr" sz="quarter" idx="4"/>
-          </p:nvPr>
-        </p:nvSpPr>
-        <p:spPr>
-          <a:xfrm>
-            <a:off x="0" y="8685213"/>
-            <a:ext cx="2971800" cy="458787"/>
-          </a:xfrm>
-          <a:prstGeom prst="rect">
-            <a:avLst/>
-          </a:prstGeom>
-        </p:spPr>
-        <p:txBody>
-          <a:bodyPr vert="horz" lIns="91440" tIns="45720" rIns="91440" bIns="45720" rtlCol="0" anchor="b"/>
-          <a:lstStyle>
-            <a:lvl1pPr algn="l">
-              <a:defRPr sz="1200"/>
-            </a:lvl1pPr>
-          </a:lstStyle>
-          <a:p>
-            <a:endParaRPr lang="en-US"/>
-          </a:p>
-        </p:txBody>
-      </p:sp>
-      <p:sp>
-        <p:nvSpPr>
-          <p:cNvPr id="7" name="Slide Number Placeholder 6"/>
-          <p:cNvSpPr>
-            <a:spLocks noGrp="1"/>
-          </p:cNvSpPr>
-          <p:nvPr>
-            <p:ph type="sldNum" sz="quarter" idx="5"/>
-          </p:nvPr>
-        </p:nvSpPr>
-        <p:spPr>
-          <a:xfrm>
-            <a:off x="3884613" y="8685213"/>
-            <a:ext cx="2971800" cy="458787"/>
-          </a:xfrm>
-          <a:prstGeom prst="rect">
-            <a:avLst/>
-          </a:prstGeom>
-        </p:spPr>
-        <p:txBody>
-          <a:bodyPr vert="horz" lIns="91440" tIns="45720" rIns="91440" bIns="45720" rtlCol="0" anchor="b"/>
-          <a:lstStyle>
-            <a:lvl1pPr algn="r">
-              <a:defRPr sz="1200"/>
-            </a:lvl1pPr>
-          </a:lstStyle>
-          <a:p>
-            <a:fld id="{CE5E9CC1-C706-0F49-92D6-E571CC5EEA8F}" type="slidenum">
-              <a:rPr lang="en-US"/>
-              <a:t>‹#›</a:t>
-            </a:fld>
-            <a:endParaRPr lang="en-US"/>
-          </a:p>
-        </p:txBody>
-      </p:sp>
     </p:spTree>
     <p:extLst>
       <p:ext uri="{BB962C8B-B14F-4D97-AF65-F5344CB8AC3E}">
-        <p14:creationId xmlns:p14="http://schemas.microsoft.com/office/powerpoint/2010/main" val="1024086991"/>
+        <p14:creationId xmlns:p14="http://schemas.microsoft.com/office/powerpoint/2010/main" val="1898273212"/>
       </p:ext>
     </p:extLst>
   </p:cSld>
@@ -510,10 +291,6 @@
           <a:bodyPr/>
           <a:lstStyle/>
           <a:p>
-            <a:r>
-              <a:rPr lang="en-US" dirty="0"/>
-              <a:t/>
-            </a:r>
             <a:endParaRPr lang="en-US" dirty="0"/>
           </a:p>
         </p:txBody>
@@ -598,10 +375,6 @@
           <a:bodyPr/>
           <a:lstStyle/>
           <a:p>
-            <a:r>
-              <a:rPr lang="en-US" dirty="0"/>
-              <a:t/>
-            </a:r>
             <a:endParaRPr lang="en-US" dirty="0"/>
           </a:p>
         </p:txBody>
@@ -686,10 +459,6 @@
           <a:bodyPr/>
           <a:lstStyle/>
           <a:p>
-            <a:r>
-              <a:rPr lang="en-US" dirty="0"/>
-              <a:t/>
-            </a:r>
             <a:endParaRPr lang="en-US" dirty="0"/>
           </a:p>
         </p:txBody>
@@ -774,10 +543,6 @@
           <a:bodyPr/>
           <a:lstStyle/>
           <a:p>
-            <a:r>
-              <a:rPr lang="en-US" dirty="0"/>
-              <a:t/>
-            </a:r>
             <a:endParaRPr lang="en-US" dirty="0"/>
           </a:p>
         </p:txBody>
@@ -862,10 +627,6 @@
           <a:bodyPr/>
           <a:lstStyle/>
           <a:p>
-            <a:r>
-              <a:rPr lang="en-US" dirty="0"/>
-              <a:t/>
-            </a:r>
             <a:endParaRPr lang="en-US" dirty="0"/>
           </a:p>
         </p:txBody>
@@ -950,10 +711,6 @@
           <a:bodyPr/>
           <a:lstStyle/>
           <a:p>
-            <a:r>
-              <a:rPr lang="en-US" dirty="0"/>
-              <a:t/>
-            </a:r>
             <a:endParaRPr lang="en-US" dirty="0"/>
           </a:p>
         </p:txBody>
@@ -1038,10 +795,6 @@
           <a:bodyPr/>
           <a:lstStyle/>
           <a:p>
-            <a:r>
-              <a:rPr lang="en-US" dirty="0"/>
-              <a:t/>
-            </a:r>
             <a:endParaRPr lang="en-US" dirty="0"/>
           </a:p>
         </p:txBody>
@@ -1126,10 +879,6 @@
           <a:bodyPr/>
           <a:lstStyle/>
           <a:p>
-            <a:r>
-              <a:rPr lang="en-US" dirty="0"/>
-              <a:t/>
-            </a:r>
             <a:endParaRPr lang="en-US" dirty="0"/>
           </a:p>
         </p:txBody>
@@ -1214,10 +963,6 @@
           <a:bodyPr/>
           <a:lstStyle/>
           <a:p>
-            <a:r>
-              <a:rPr lang="en-US" dirty="0"/>
-              <a:t/>
-            </a:r>
             <a:endParaRPr lang="en-US" dirty="0"/>
           </a:p>
         </p:txBody>
@@ -1302,10 +1047,6 @@
           <a:bodyPr/>
           <a:lstStyle/>
           <a:p>
-            <a:r>
-              <a:rPr lang="en-US" dirty="0"/>
-              <a:t/>
-            </a:r>
             <a:endParaRPr lang="en-US" dirty="0"/>
           </a:p>
         </p:txBody>
@@ -1390,10 +1131,6 @@
           <a:bodyPr/>
           <a:lstStyle/>
           <a:p>
-            <a:r>
-              <a:rPr lang="en-US" dirty="0"/>
-              <a:t/>
-            </a:r>
             <a:endParaRPr lang="en-US" dirty="0"/>
           </a:p>
         </p:txBody>
@@ -1472,6 +1209,7 @@
         <a:solidFill>
           <a:srgbClr val="070B0A"/>
         </a:solidFill>
+        <a:effectLst/>
       </p:bgPr>
     </p:bg>
     <p:spTree>
@@ -1512,6 +1250,13 @@
             <a:prstDash val="solid"/>
           </a:ln>
         </p:spPr>
+        <p:txBody>
+          <a:bodyPr/>
+          <a:lstStyle/>
+          <a:p>
+            <a:endParaRPr lang="en-US"/>
+          </a:p>
+        </p:txBody>
       </p:sp>
       <p:sp>
         <p:nvSpPr>
@@ -1535,6 +1280,13 @@
             <a:prstDash val="solid"/>
           </a:ln>
         </p:spPr>
+        <p:txBody>
+          <a:bodyPr/>
+          <a:lstStyle/>
+          <a:p>
+            <a:endParaRPr lang="en-US"/>
+          </a:p>
+        </p:txBody>
       </p:sp>
       <p:sp>
         <p:nvSpPr>
@@ -1556,7 +1308,7 @@
           </a:prstGeom>
           <a:extLst>
             <a:ext uri="{C572A759-6A51-4108-AA02-DFA0A04FC94B}">
-              <ma14:wrappingTextBoxFlag xmlns:ma14="http://schemas.microsoft.com/office/mac/drawingml/2011/main" val="0"/>
+              <ma14:wrappingTextBoxFlag xmlns:ma14="http://schemas.microsoft.com/office/mac/drawingml/2011/main" xmlns="" val="0"/>
             </a:ext>
           </a:extLst>
         </p:spPr>
@@ -1574,8 +1326,8 @@
           <a:p>
             <a:pPr algn="l"/>
             <a:fld id="{F7021451-1387-4CA6-816F-3879F97B5CBC}" type="slidenum">
-              <a:rPr b="0" lang="en-US"/>
-              <a:t>1002</a:t>
+              <a:rPr lang="en-US" b="0"/>
+              <a:t>‹#›</a:t>
             </a:fld>
             <a:endParaRPr lang="en-US"/>
           </a:p>
@@ -1592,6 +1344,11 @@
 <file path=ppt/slideMasters/slideMaster1.xml><?xml version="1.0" encoding="utf-8"?>
 <p:sldMaster xmlns:a="http://schemas.openxmlformats.org/drawingml/2006/main" xmlns:r="http://schemas.openxmlformats.org/officeDocument/2006/relationships" xmlns:p="http://schemas.openxmlformats.org/presentationml/2006/main">
   <p:cSld>
+    <p:bg>
+      <p:bgRef idx="1001">
+        <a:schemeClr val="bg1"/>
+      </p:bgRef>
+    </p:bg>
     <p:spTree>
       <p:nvGrpSpPr>
         <p:cNvPr id="1" name=""/>
@@ -1626,7 +1383,7 @@
           </a:prstGeom>
           <a:extLst>
             <a:ext uri="{C572A759-6A51-4108-AA02-DFA0A04FC94B}">
-              <ma14:wrappingTextBoxFlag xmlns:ma14="http://schemas.microsoft.com/office/mac/drawingml/2011/main" val="0"/>
+              <ma14:wrappingTextBoxFlag xmlns:ma14="http://schemas.microsoft.com/office/mac/drawingml/2011/main" xmlns="" val="0"/>
             </a:ext>
           </a:extLst>
         </p:spPr>
@@ -1644,8 +1401,8 @@
           <a:p>
             <a:pPr algn="l"/>
             <a:fld id="{F7021451-1387-4CA6-816F-3879F97B5CBC}" type="slidenum">
-              <a:rPr b="0" lang="en-US"/>
-              <a:t>null</a:t>
+              <a:rPr lang="en-US" b="0"/>
+              <a:t>‹#›</a:t>
             </a:fld>
             <a:endParaRPr lang="en-US"/>
           </a:p>
@@ -1920,6 +1677,7 @@
         <a:solidFill>
           <a:srgbClr val="070B0A"/>
         </a:solidFill>
+        <a:effectLst/>
       </p:bgPr>
     </p:bg>
     <p:spTree>
@@ -1957,7 +1715,7 @@
           <a:ln/>
           <a:extLst>
             <a:ext uri="{C572A759-6A51-4108-AA02-DFA0A04FC94B}">
-              <ma14:wrappingTextBoxFlag xmlns:ma14="http://schemas.microsoft.com/office/mac/drawingml/2011/main" val="0"/>
+              <ma14:wrappingTextBoxFlag xmlns:ma14="http://schemas.microsoft.com/office/mac/drawingml/2011/main" xmlns="" val="0"/>
             </a:ext>
           </a:extLst>
         </p:spPr>
@@ -1975,7 +1733,7 @@
           <a:p>
             <a:pPr algn="l"/>
             <a:fld id="{F7021451-1387-4CA6-816F-3879F97B5CBC}" type="slidenum">
-              <a:rPr b="0" lang="en-US"/>
+              <a:rPr lang="en-US" b="0"/>
               <a:t>1</a:t>
             </a:fld>
             <a:endParaRPr lang="en-US"/>
@@ -1991,7 +1749,7 @@
           <p:nvPr/>
         </p:nvPicPr>
         <p:blipFill>
-          <a:blip r:embed="rId5"/>
+          <a:blip r:embed="rId3"/>
           <a:stretch>
             <a:fillRect/>
           </a:stretch>
@@ -2054,7 +1812,7 @@
           </a:bodyPr>
           <a:lstStyle/>
           <a:p>
-            <a:pPr indent="0" marL="0">
+            <a:pPr marL="0" indent="0">
               <a:buNone/>
             </a:pPr>
             <a:r>
@@ -2095,7 +1853,7 @@
           </a:bodyPr>
           <a:lstStyle/>
           <a:p>
-            <a:pPr indent="0" marL="0">
+            <a:pPr marL="0" indent="0">
               <a:buNone/>
             </a:pPr>
             <a:r>
@@ -2138,7 +1896,10 @@
         </p:spPr>
         <p:txBody>
           <a:bodyPr/>
-          <a:p/>
+          <a:lstStyle/>
+          <a:p>
+            <a:endParaRPr/>
+          </a:p>
         </p:txBody>
       </p:sp>
       <p:sp>
@@ -2167,7 +1928,10 @@
         </p:spPr>
         <p:txBody>
           <a:bodyPr/>
-          <a:p/>
+          <a:lstStyle/>
+          <a:p>
+            <a:endParaRPr/>
+          </a:p>
         </p:txBody>
       </p:sp>
       <p:sp>
@@ -2193,7 +1957,7 @@
           </a:bodyPr>
           <a:lstStyle/>
           <a:p>
-            <a:pPr algn="ctr" indent="0" marL="0">
+            <a:pPr marL="0" indent="0" algn="ctr">
               <a:buNone/>
             </a:pPr>
             <a:r>
@@ -2231,7 +1995,7 @@
           </a:bodyPr>
           <a:lstStyle/>
           <a:p>
-            <a:pPr indent="0" marL="0">
+            <a:pPr marL="0" indent="0">
               <a:buNone/>
             </a:pPr>
             <a:r>
@@ -2269,7 +2033,7 @@
           </a:bodyPr>
           <a:lstStyle/>
           <a:p>
-            <a:pPr algn="r" indent="0" marL="0">
+            <a:pPr marL="0" indent="0" algn="r">
               <a:buNone/>
             </a:pPr>
             <a:r>
@@ -2312,7 +2076,10 @@
         </p:spPr>
         <p:txBody>
           <a:bodyPr/>
-          <a:p/>
+          <a:lstStyle/>
+          <a:p>
+            <a:endParaRPr/>
+          </a:p>
         </p:txBody>
       </p:sp>
       <p:sp>
@@ -2341,7 +2108,10 @@
         </p:spPr>
         <p:txBody>
           <a:bodyPr/>
-          <a:p/>
+          <a:lstStyle/>
+          <a:p>
+            <a:endParaRPr/>
+          </a:p>
         </p:txBody>
       </p:sp>
       <p:sp>
@@ -2367,7 +2137,7 @@
           </a:bodyPr>
           <a:lstStyle/>
           <a:p>
-            <a:pPr algn="ctr" indent="0" marL="0">
+            <a:pPr marL="0" indent="0" algn="ctr">
               <a:buNone/>
             </a:pPr>
             <a:r>
@@ -2405,7 +2175,7 @@
           </a:bodyPr>
           <a:lstStyle/>
           <a:p>
-            <a:pPr indent="0" marL="0">
+            <a:pPr marL="0" indent="0">
               <a:buNone/>
             </a:pPr>
             <a:r>
@@ -2443,7 +2213,7 @@
           </a:bodyPr>
           <a:lstStyle/>
           <a:p>
-            <a:pPr algn="r" indent="0" marL="0">
+            <a:pPr marL="0" indent="0" algn="r">
               <a:buNone/>
             </a:pPr>
             <a:r>
@@ -2486,7 +2256,10 @@
         </p:spPr>
         <p:txBody>
           <a:bodyPr/>
-          <a:p/>
+          <a:lstStyle/>
+          <a:p>
+            <a:endParaRPr/>
+          </a:p>
         </p:txBody>
       </p:sp>
       <p:sp>
@@ -2515,7 +2288,10 @@
         </p:spPr>
         <p:txBody>
           <a:bodyPr/>
-          <a:p/>
+          <a:lstStyle/>
+          <a:p>
+            <a:endParaRPr/>
+          </a:p>
         </p:txBody>
       </p:sp>
       <p:sp>
@@ -2541,7 +2317,7 @@
           </a:bodyPr>
           <a:lstStyle/>
           <a:p>
-            <a:pPr algn="ctr" indent="0" marL="0">
+            <a:pPr marL="0" indent="0" algn="ctr">
               <a:buNone/>
             </a:pPr>
             <a:r>
@@ -2579,7 +2355,7 @@
           </a:bodyPr>
           <a:lstStyle/>
           <a:p>
-            <a:pPr indent="0" marL="0">
+            <a:pPr marL="0" indent="0">
               <a:buNone/>
             </a:pPr>
             <a:r>
@@ -2617,7 +2393,7 @@
           </a:bodyPr>
           <a:lstStyle/>
           <a:p>
-            <a:pPr algn="r" indent="0" marL="0">
+            <a:pPr marL="0" indent="0" algn="r">
               <a:buNone/>
             </a:pPr>
             <a:r>
@@ -2660,7 +2436,10 @@
         </p:spPr>
         <p:txBody>
           <a:bodyPr/>
-          <a:p/>
+          <a:lstStyle/>
+          <a:p>
+            <a:endParaRPr/>
+          </a:p>
         </p:txBody>
       </p:sp>
       <p:sp>
@@ -2689,7 +2468,10 @@
         </p:spPr>
         <p:txBody>
           <a:bodyPr/>
-          <a:p/>
+          <a:lstStyle/>
+          <a:p>
+            <a:endParaRPr/>
+          </a:p>
         </p:txBody>
       </p:sp>
       <p:sp>
@@ -2715,7 +2497,7 @@
           </a:bodyPr>
           <a:lstStyle/>
           <a:p>
-            <a:pPr algn="ctr" indent="0" marL="0">
+            <a:pPr marL="0" indent="0" algn="ctr">
               <a:buNone/>
             </a:pPr>
             <a:r>
@@ -2753,7 +2535,7 @@
           </a:bodyPr>
           <a:lstStyle/>
           <a:p>
-            <a:pPr indent="0" marL="0">
+            <a:pPr marL="0" indent="0">
               <a:buNone/>
             </a:pPr>
             <a:r>
@@ -2791,7 +2573,7 @@
           </a:bodyPr>
           <a:lstStyle/>
           <a:p>
-            <a:pPr algn="r" indent="0" marL="0">
+            <a:pPr marL="0" indent="0" algn="r">
               <a:buNone/>
             </a:pPr>
             <a:r>
@@ -2834,7 +2616,10 @@
         </p:spPr>
         <p:txBody>
           <a:bodyPr/>
-          <a:p/>
+          <a:lstStyle/>
+          <a:p>
+            <a:endParaRPr/>
+          </a:p>
         </p:txBody>
       </p:sp>
       <p:sp>
@@ -2863,7 +2648,10 @@
         </p:spPr>
         <p:txBody>
           <a:bodyPr/>
-          <a:p/>
+          <a:lstStyle/>
+          <a:p>
+            <a:endParaRPr/>
+          </a:p>
         </p:txBody>
       </p:sp>
       <p:sp>
@@ -2889,7 +2677,7 @@
           </a:bodyPr>
           <a:lstStyle/>
           <a:p>
-            <a:pPr algn="ctr" indent="0" marL="0">
+            <a:pPr marL="0" indent="0" algn="ctr">
               <a:buNone/>
             </a:pPr>
             <a:r>
@@ -2927,7 +2715,7 @@
           </a:bodyPr>
           <a:lstStyle/>
           <a:p>
-            <a:pPr indent="0" marL="0">
+            <a:pPr marL="0" indent="0">
               <a:buNone/>
             </a:pPr>
             <a:r>
@@ -2965,7 +2753,7 @@
           </a:bodyPr>
           <a:lstStyle/>
           <a:p>
-            <a:pPr algn="r" indent="0" marL="0">
+            <a:pPr marL="0" indent="0" algn="r">
               <a:buNone/>
             </a:pPr>
             <a:r>
@@ -3003,7 +2791,7 @@
           </a:bodyPr>
           <a:lstStyle/>
           <a:p>
-            <a:pPr indent="0" marL="0">
+            <a:pPr marL="0" indent="0">
               <a:buNone/>
             </a:pPr>
             <a:r>
@@ -3020,7 +2808,7 @@
       </p:sp>
       <p:sp>
         <p:nvSpPr>
-          <p:cNvPr id="25" name="Slide Number Placeholder 0"/>
+          <p:cNvPr id="30" name="Slide Number Placeholder 0"/>
           <p:cNvSpPr>
             <a:spLocks noGrp="1"/>
           </p:cNvSpPr>
@@ -3039,7 +2827,7 @@
           <a:ln/>
           <a:extLst>
             <a:ext uri="{C572A759-6A51-4108-AA02-DFA0A04FC94B}">
-              <ma14:wrappingTextBoxFlag xmlns:ma14="http://schemas.microsoft.com/office/mac/drawingml/2011/main" val="0"/>
+              <ma14:wrappingTextBoxFlag xmlns:ma14="http://schemas.microsoft.com/office/mac/drawingml/2011/main" xmlns="" val="0"/>
             </a:ext>
           </a:extLst>
         </p:spPr>
@@ -3057,7 +2845,7 @@
           <a:p>
             <a:pPr algn="l"/>
             <a:fld id="{F7021451-1387-4CA6-816F-3879F97B5CBC}" type="slidenum">
-              <a:rPr b="0" lang="en-US"/>
+              <a:rPr lang="en-US" b="0"/>
               <a:t>10</a:t>
             </a:fld>
             <a:endParaRPr lang="en-US"/>
@@ -3112,7 +2900,7 @@
           </a:bodyPr>
           <a:lstStyle/>
           <a:p>
-            <a:pPr indent="0" marL="0">
+            <a:pPr marL="0" indent="0">
               <a:buNone/>
             </a:pPr>
             <a:r>
@@ -3153,7 +2941,7 @@
           </a:bodyPr>
           <a:lstStyle/>
           <a:p>
-            <a:pPr indent="0" marL="0">
+            <a:pPr marL="0" indent="0">
               <a:buNone/>
             </a:pPr>
             <a:r>
@@ -3196,7 +2984,10 @@
         </p:spPr>
         <p:txBody>
           <a:bodyPr/>
-          <a:p/>
+          <a:lstStyle/>
+          <a:p>
+            <a:endParaRPr/>
+          </a:p>
         </p:txBody>
       </p:sp>
       <p:sp>
@@ -3225,7 +3016,10 @@
         </p:spPr>
         <p:txBody>
           <a:bodyPr/>
-          <a:p/>
+          <a:lstStyle/>
+          <a:p>
+            <a:endParaRPr/>
+          </a:p>
         </p:txBody>
       </p:sp>
       <p:sp>
@@ -3254,7 +3048,10 @@
         </p:spPr>
         <p:txBody>
           <a:bodyPr/>
-          <a:p/>
+          <a:lstStyle/>
+          <a:p>
+            <a:endParaRPr/>
+          </a:p>
         </p:txBody>
       </p:sp>
       <p:sp>
@@ -3283,7 +3080,10 @@
         </p:spPr>
         <p:txBody>
           <a:bodyPr/>
-          <a:p/>
+          <a:lstStyle/>
+          <a:p>
+            <a:endParaRPr/>
+          </a:p>
         </p:txBody>
       </p:sp>
       <p:sp>
@@ -3307,7 +3107,7 @@
           <a:bodyPr wrap="square" lIns="0" tIns="0" rIns="0" bIns="0" rtlCol="0" anchor="ctr"/>
           <a:lstStyle/>
           <a:p>
-            <a:pPr algn="ctr" indent="0" marL="0">
+            <a:pPr marL="0" indent="0" algn="ctr">
               <a:buNone/>
             </a:pPr>
             <a:r>
@@ -3343,7 +3143,7 @@
           <a:bodyPr wrap="square" lIns="0" tIns="0" rIns="0" bIns="0" rtlCol="0" anchor="ctr"/>
           <a:lstStyle/>
           <a:p>
-            <a:pPr algn="ctr" indent="0" marL="0">
+            <a:pPr marL="0" indent="0" algn="ctr">
               <a:buNone/>
             </a:pPr>
             <a:r>
@@ -3384,7 +3184,10 @@
         </p:spPr>
         <p:txBody>
           <a:bodyPr/>
-          <a:p/>
+          <a:lstStyle/>
+          <a:p>
+            <a:endParaRPr/>
+          </a:p>
         </p:txBody>
       </p:sp>
       <p:sp>
@@ -3415,7 +3218,10 @@
         </p:spPr>
         <p:txBody>
           <a:bodyPr/>
-          <a:p/>
+          <a:lstStyle/>
+          <a:p>
+            <a:endParaRPr/>
+          </a:p>
         </p:txBody>
       </p:sp>
       <p:sp>
@@ -3444,7 +3250,10 @@
         </p:spPr>
         <p:txBody>
           <a:bodyPr/>
-          <a:p/>
+          <a:lstStyle/>
+          <a:p>
+            <a:endParaRPr/>
+          </a:p>
         </p:txBody>
       </p:sp>
       <p:sp>
@@ -3471,7 +3280,10 @@
         </p:spPr>
         <p:txBody>
           <a:bodyPr/>
-          <a:p/>
+          <a:lstStyle/>
+          <a:p>
+            <a:endParaRPr/>
+          </a:p>
         </p:txBody>
       </p:sp>
       <p:sp>
@@ -3498,7 +3310,10 @@
         </p:spPr>
         <p:txBody>
           <a:bodyPr/>
-          <a:p/>
+          <a:lstStyle/>
+          <a:p>
+            <a:endParaRPr/>
+          </a:p>
         </p:txBody>
       </p:sp>
       <p:sp>
@@ -3525,7 +3340,10 @@
         </p:spPr>
         <p:txBody>
           <a:bodyPr/>
-          <a:p/>
+          <a:lstStyle/>
+          <a:p>
+            <a:endParaRPr/>
+          </a:p>
         </p:txBody>
       </p:sp>
       <p:sp>
@@ -3549,7 +3367,7 @@
           <a:bodyPr wrap="square" lIns="0" tIns="0" rIns="0" bIns="0" rtlCol="0" anchor="ctr"/>
           <a:lstStyle/>
           <a:p>
-            <a:pPr algn="ctr" indent="0" marL="0">
+            <a:pPr marL="0" indent="0" algn="ctr">
               <a:buNone/>
             </a:pPr>
             <a:r>
@@ -3585,7 +3403,7 @@
           <a:bodyPr wrap="square" lIns="0" tIns="0" rIns="0" bIns="0" rtlCol="0" anchor="ctr"/>
           <a:lstStyle/>
           <a:p>
-            <a:pPr algn="ctr" indent="0" marL="0">
+            <a:pPr marL="0" indent="0" algn="ctr">
               <a:buNone/>
             </a:pPr>
             <a:r>
@@ -3626,7 +3444,10 @@
         </p:spPr>
         <p:txBody>
           <a:bodyPr/>
-          <a:p/>
+          <a:lstStyle/>
+          <a:p>
+            <a:endParaRPr/>
+          </a:p>
         </p:txBody>
       </p:sp>
       <p:sp>
@@ -3657,7 +3478,10 @@
         </p:spPr>
         <p:txBody>
           <a:bodyPr/>
-          <a:p/>
+          <a:lstStyle/>
+          <a:p>
+            <a:endParaRPr/>
+          </a:p>
         </p:txBody>
       </p:sp>
       <p:sp>
@@ -3686,7 +3510,10 @@
         </p:spPr>
         <p:txBody>
           <a:bodyPr/>
-          <a:p/>
+          <a:lstStyle/>
+          <a:p>
+            <a:endParaRPr/>
+          </a:p>
         </p:txBody>
       </p:sp>
       <p:sp>
@@ -3713,7 +3540,10 @@
         </p:spPr>
         <p:txBody>
           <a:bodyPr/>
-          <a:p/>
+          <a:lstStyle/>
+          <a:p>
+            <a:endParaRPr/>
+          </a:p>
         </p:txBody>
       </p:sp>
       <p:sp>
@@ -3740,7 +3570,10 @@
         </p:spPr>
         <p:txBody>
           <a:bodyPr/>
-          <a:p/>
+          <a:lstStyle/>
+          <a:p>
+            <a:endParaRPr/>
+          </a:p>
         </p:txBody>
       </p:sp>
       <p:sp>
@@ -3767,7 +3600,10 @@
         </p:spPr>
         <p:txBody>
           <a:bodyPr/>
-          <a:p/>
+          <a:lstStyle/>
+          <a:p>
+            <a:endParaRPr/>
+          </a:p>
         </p:txBody>
       </p:sp>
       <p:sp>
@@ -3791,7 +3627,7 @@
           <a:bodyPr wrap="square" lIns="0" tIns="0" rIns="0" bIns="0" rtlCol="0" anchor="ctr"/>
           <a:lstStyle/>
           <a:p>
-            <a:pPr algn="ctr" indent="0" marL="0">
+            <a:pPr marL="0" indent="0" algn="ctr">
               <a:buNone/>
             </a:pPr>
             <a:r>
@@ -3827,7 +3663,7 @@
           <a:bodyPr wrap="square" lIns="0" tIns="0" rIns="0" bIns="0" rtlCol="0" anchor="ctr"/>
           <a:lstStyle/>
           <a:p>
-            <a:pPr algn="ctr" indent="0" marL="0">
+            <a:pPr marL="0" indent="0" algn="ctr">
               <a:buNone/>
             </a:pPr>
             <a:r>
@@ -3870,7 +3706,10 @@
         </p:spPr>
         <p:txBody>
           <a:bodyPr/>
-          <a:p/>
+          <a:lstStyle/>
+          <a:p>
+            <a:endParaRPr/>
+          </a:p>
         </p:txBody>
       </p:sp>
       <p:sp>
@@ -3901,7 +3740,10 @@
         </p:spPr>
         <p:txBody>
           <a:bodyPr/>
-          <a:p/>
+          <a:lstStyle/>
+          <a:p>
+            <a:endParaRPr/>
+          </a:p>
         </p:txBody>
       </p:sp>
       <p:sp>
@@ -3927,7 +3769,7 @@
           </a:bodyPr>
           <a:lstStyle/>
           <a:p>
-            <a:pPr algn="ctr" indent="0" marL="0">
+            <a:pPr marL="0" indent="0" algn="ctr">
               <a:buNone/>
             </a:pPr>
             <a:r>
@@ -3965,7 +3807,7 @@
           </a:bodyPr>
           <a:lstStyle/>
           <a:p>
-            <a:pPr indent="0" marL="0">
+            <a:pPr marL="0" indent="0">
               <a:buNone/>
             </a:pPr>
             <a:r>
@@ -4001,7 +3843,7 @@
           <a:bodyPr wrap="square" lIns="0" tIns="0" rIns="0" bIns="0" rtlCol="0" anchor="ctr"/>
           <a:lstStyle/>
           <a:p>
-            <a:pPr algn="ctr" indent="0" marL="0">
+            <a:pPr marL="0" indent="0" algn="ctr">
               <a:buNone/>
             </a:pPr>
             <a:r>
@@ -4039,7 +3881,7 @@
           </a:bodyPr>
           <a:lstStyle/>
           <a:p>
-            <a:pPr indent="0" marL="0">
+            <a:pPr marL="0" indent="0">
               <a:buNone/>
             </a:pPr>
             <a:r>
@@ -4056,7 +3898,7 @@
       </p:sp>
       <p:sp>
         <p:nvSpPr>
-          <p:cNvPr id="25" name="Slide Number Placeholder 0"/>
+          <p:cNvPr id="32" name="Slide Number Placeholder 0"/>
           <p:cNvSpPr>
             <a:spLocks noGrp="1"/>
           </p:cNvSpPr>
@@ -4075,7 +3917,7 @@
           <a:ln/>
           <a:extLst>
             <a:ext uri="{C572A759-6A51-4108-AA02-DFA0A04FC94B}">
-              <ma14:wrappingTextBoxFlag xmlns:ma14="http://schemas.microsoft.com/office/mac/drawingml/2011/main" val="0"/>
+              <ma14:wrappingTextBoxFlag xmlns:ma14="http://schemas.microsoft.com/office/mac/drawingml/2011/main" xmlns="" val="0"/>
             </a:ext>
           </a:extLst>
         </p:spPr>
@@ -4093,7 +3935,7 @@
           <a:p>
             <a:pPr algn="l"/>
             <a:fld id="{F7021451-1387-4CA6-816F-3879F97B5CBC}" type="slidenum">
-              <a:rPr b="0" lang="en-US"/>
+              <a:rPr lang="en-US" b="0"/>
               <a:t>11</a:t>
             </a:fld>
             <a:endParaRPr lang="en-US"/>
@@ -4148,7 +3990,7 @@
           </a:bodyPr>
           <a:lstStyle/>
           <a:p>
-            <a:pPr indent="0" marL="0">
+            <a:pPr marL="0" indent="0">
               <a:buNone/>
             </a:pPr>
             <a:r>
@@ -4189,7 +4031,7 @@
           </a:bodyPr>
           <a:lstStyle/>
           <a:p>
-            <a:pPr indent="0" marL="0">
+            <a:pPr marL="0" indent="0">
               <a:buNone/>
             </a:pPr>
             <a:r>
@@ -4232,7 +4074,10 @@
         </p:spPr>
         <p:txBody>
           <a:bodyPr/>
-          <a:p/>
+          <a:lstStyle/>
+          <a:p>
+            <a:endParaRPr/>
+          </a:p>
         </p:txBody>
       </p:sp>
       <p:sp>
@@ -4261,7 +4106,10 @@
         </p:spPr>
         <p:txBody>
           <a:bodyPr/>
-          <a:p/>
+          <a:lstStyle/>
+          <a:p>
+            <a:endParaRPr/>
+          </a:p>
         </p:txBody>
       </p:sp>
       <p:sp>
@@ -4287,7 +4135,7 @@
           </a:bodyPr>
           <a:lstStyle/>
           <a:p>
-            <a:pPr indent="0" marL="0">
+            <a:pPr marL="0" indent="0">
               <a:buNone/>
             </a:pPr>
             <a:r>
@@ -4325,7 +4173,7 @@
           </a:bodyPr>
           <a:lstStyle/>
           <a:p>
-            <a:pPr indent="0" marL="0">
+            <a:pPr marL="0" indent="0">
               <a:buNone/>
             </a:pPr>
             <a:r>
@@ -4366,7 +4214,10 @@
         </p:spPr>
         <p:txBody>
           <a:bodyPr/>
-          <a:p/>
+          <a:lstStyle/>
+          <a:p>
+            <a:endParaRPr/>
+          </a:p>
         </p:txBody>
       </p:sp>
       <p:sp>
@@ -4392,7 +4243,7 @@
           </a:bodyPr>
           <a:lstStyle/>
           <a:p>
-            <a:pPr algn="ctr" indent="0" marL="0">
+            <a:pPr marL="0" indent="0" algn="ctr">
               <a:buNone/>
             </a:pPr>
             <a:r>
@@ -4435,7 +4286,10 @@
         </p:spPr>
         <p:txBody>
           <a:bodyPr/>
-          <a:p/>
+          <a:lstStyle/>
+          <a:p>
+            <a:endParaRPr/>
+          </a:p>
         </p:txBody>
       </p:sp>
       <p:sp>
@@ -4464,7 +4318,10 @@
         </p:spPr>
         <p:txBody>
           <a:bodyPr/>
-          <a:p/>
+          <a:lstStyle/>
+          <a:p>
+            <a:endParaRPr/>
+          </a:p>
         </p:txBody>
       </p:sp>
       <p:sp>
@@ -4490,7 +4347,7 @@
           </a:bodyPr>
           <a:lstStyle/>
           <a:p>
-            <a:pPr indent="0" marL="0">
+            <a:pPr marL="0" indent="0">
               <a:buNone/>
             </a:pPr>
             <a:r>
@@ -4528,7 +4385,7 @@
           </a:bodyPr>
           <a:lstStyle/>
           <a:p>
-            <a:pPr indent="0" marL="0">
+            <a:pPr marL="0" indent="0">
               <a:buNone/>
             </a:pPr>
             <a:r>
@@ -4569,7 +4426,10 @@
         </p:spPr>
         <p:txBody>
           <a:bodyPr/>
-          <a:p/>
+          <a:lstStyle/>
+          <a:p>
+            <a:endParaRPr/>
+          </a:p>
         </p:txBody>
       </p:sp>
       <p:sp>
@@ -4595,7 +4455,7 @@
           </a:bodyPr>
           <a:lstStyle/>
           <a:p>
-            <a:pPr algn="ctr" indent="0" marL="0">
+            <a:pPr marL="0" indent="0" algn="ctr">
               <a:buNone/>
             </a:pPr>
             <a:r>
@@ -4638,7 +4498,10 @@
         </p:spPr>
         <p:txBody>
           <a:bodyPr/>
-          <a:p/>
+          <a:lstStyle/>
+          <a:p>
+            <a:endParaRPr/>
+          </a:p>
         </p:txBody>
       </p:sp>
       <p:sp>
@@ -4667,7 +4530,10 @@
         </p:spPr>
         <p:txBody>
           <a:bodyPr/>
-          <a:p/>
+          <a:lstStyle/>
+          <a:p>
+            <a:endParaRPr/>
+          </a:p>
         </p:txBody>
       </p:sp>
       <p:sp>
@@ -4693,7 +4559,7 @@
           </a:bodyPr>
           <a:lstStyle/>
           <a:p>
-            <a:pPr indent="0" marL="0">
+            <a:pPr marL="0" indent="0">
               <a:buNone/>
             </a:pPr>
             <a:r>
@@ -4731,7 +4597,7 @@
           </a:bodyPr>
           <a:lstStyle/>
           <a:p>
-            <a:pPr indent="0" marL="0">
+            <a:pPr marL="0" indent="0">
               <a:buNone/>
             </a:pPr>
             <a:r>
@@ -4772,7 +4638,10 @@
         </p:spPr>
         <p:txBody>
           <a:bodyPr/>
-          <a:p/>
+          <a:lstStyle/>
+          <a:p>
+            <a:endParaRPr/>
+          </a:p>
         </p:txBody>
       </p:sp>
       <p:sp>
@@ -4798,7 +4667,7 @@
           </a:bodyPr>
           <a:lstStyle/>
           <a:p>
-            <a:pPr algn="ctr" indent="0" marL="0">
+            <a:pPr marL="0" indent="0" algn="ctr">
               <a:buNone/>
             </a:pPr>
             <a:r>
@@ -4841,7 +4710,10 @@
         </p:spPr>
         <p:txBody>
           <a:bodyPr/>
-          <a:p/>
+          <a:lstStyle/>
+          <a:p>
+            <a:endParaRPr/>
+          </a:p>
         </p:txBody>
       </p:sp>
       <p:sp>
@@ -4870,7 +4742,10 @@
         </p:spPr>
         <p:txBody>
           <a:bodyPr/>
-          <a:p/>
+          <a:lstStyle/>
+          <a:p>
+            <a:endParaRPr/>
+          </a:p>
         </p:txBody>
       </p:sp>
       <p:sp>
@@ -4896,7 +4771,7 @@
           </a:bodyPr>
           <a:lstStyle/>
           <a:p>
-            <a:pPr indent="0" marL="0">
+            <a:pPr marL="0" indent="0">
               <a:buNone/>
             </a:pPr>
             <a:r>
@@ -4934,7 +4809,7 @@
           </a:bodyPr>
           <a:lstStyle/>
           <a:p>
-            <a:pPr indent="0" marL="0">
+            <a:pPr marL="0" indent="0">
               <a:buNone/>
             </a:pPr>
             <a:r>
@@ -4975,7 +4850,10 @@
         </p:spPr>
         <p:txBody>
           <a:bodyPr/>
-          <a:p/>
+          <a:lstStyle/>
+          <a:p>
+            <a:endParaRPr/>
+          </a:p>
         </p:txBody>
       </p:sp>
       <p:sp>
@@ -5001,7 +4879,7 @@
           </a:bodyPr>
           <a:lstStyle/>
           <a:p>
-            <a:pPr algn="ctr" indent="0" marL="0">
+            <a:pPr marL="0" indent="0" algn="ctr">
               <a:buNone/>
             </a:pPr>
             <a:r>
@@ -5044,7 +4922,10 @@
         </p:spPr>
         <p:txBody>
           <a:bodyPr/>
-          <a:p/>
+          <a:lstStyle/>
+          <a:p>
+            <a:endParaRPr/>
+          </a:p>
         </p:txBody>
       </p:sp>
       <p:sp>
@@ -5068,7 +4949,7 @@
           <a:bodyPr wrap="square" lIns="0" tIns="0" rIns="0" bIns="0" rtlCol="0" anchor="ctr"/>
           <a:lstStyle/>
           <a:p>
-            <a:pPr indent="0" marL="0">
+            <a:pPr marL="0" indent="0">
               <a:buNone/>
             </a:pPr>
             <a:r>
@@ -5106,7 +4987,7 @@
           </a:bodyPr>
           <a:lstStyle/>
           <a:p>
-            <a:pPr indent="0" marL="0">
+            <a:pPr marL="0" indent="0">
               <a:buNone/>
             </a:pPr>
             <a:r>
@@ -5149,7 +5030,10 @@
         </p:spPr>
         <p:txBody>
           <a:bodyPr/>
-          <a:p/>
+          <a:lstStyle/>
+          <a:p>
+            <a:endParaRPr/>
+          </a:p>
         </p:txBody>
       </p:sp>
       <p:sp>
@@ -5175,7 +5059,7 @@
           </a:bodyPr>
           <a:lstStyle/>
           <a:p>
-            <a:pPr algn="ctr" indent="0" marL="0">
+            <a:pPr marL="0" indent="0" algn="ctr">
               <a:buNone/>
             </a:pPr>
             <a:r>
@@ -5218,7 +5102,10 @@
         </p:spPr>
         <p:txBody>
           <a:bodyPr/>
-          <a:p/>
+          <a:lstStyle/>
+          <a:p>
+            <a:endParaRPr/>
+          </a:p>
         </p:txBody>
       </p:sp>
       <p:sp>
@@ -5244,7 +5131,7 @@
           </a:bodyPr>
           <a:lstStyle/>
           <a:p>
-            <a:pPr algn="ctr" indent="0" marL="0">
+            <a:pPr marL="0" indent="0" algn="ctr">
               <a:buNone/>
             </a:pPr>
             <a:r>
@@ -5287,7 +5174,10 @@
         </p:spPr>
         <p:txBody>
           <a:bodyPr/>
-          <a:p/>
+          <a:lstStyle/>
+          <a:p>
+            <a:endParaRPr/>
+          </a:p>
         </p:txBody>
       </p:sp>
       <p:sp>
@@ -5313,7 +5203,7 @@
           </a:bodyPr>
           <a:lstStyle/>
           <a:p>
-            <a:pPr algn="ctr" indent="0" marL="0">
+            <a:pPr marL="0" indent="0" algn="ctr">
               <a:buNone/>
             </a:pPr>
             <a:r>
@@ -5354,7 +5244,10 @@
         </p:spPr>
         <p:txBody>
           <a:bodyPr/>
-          <a:p/>
+          <a:lstStyle/>
+          <a:p>
+            <a:endParaRPr/>
+          </a:p>
         </p:txBody>
       </p:sp>
       <p:sp>
@@ -5383,7 +5276,10 @@
         </p:spPr>
         <p:txBody>
           <a:bodyPr/>
-          <a:p/>
+          <a:lstStyle/>
+          <a:p>
+            <a:endParaRPr/>
+          </a:p>
         </p:txBody>
       </p:sp>
       <p:sp>
@@ -5412,7 +5308,10 @@
         </p:spPr>
         <p:txBody>
           <a:bodyPr/>
-          <a:p/>
+          <a:lstStyle/>
+          <a:p>
+            <a:endParaRPr/>
+          </a:p>
         </p:txBody>
       </p:sp>
       <p:sp>
@@ -5438,7 +5337,7 @@
           </a:bodyPr>
           <a:lstStyle/>
           <a:p>
-            <a:pPr indent="0" marL="0">
+            <a:pPr marL="0" indent="0">
               <a:buNone/>
             </a:pPr>
             <a:r>
@@ -5455,7 +5354,7 @@
       </p:sp>
       <p:sp>
         <p:nvSpPr>
-          <p:cNvPr id="25" name="Slide Number Placeholder 0"/>
+          <p:cNvPr id="41" name="Slide Number Placeholder 0"/>
           <p:cNvSpPr>
             <a:spLocks noGrp="1"/>
           </p:cNvSpPr>
@@ -5474,7 +5373,7 @@
           <a:ln/>
           <a:extLst>
             <a:ext uri="{C572A759-6A51-4108-AA02-DFA0A04FC94B}">
-              <ma14:wrappingTextBoxFlag xmlns:ma14="http://schemas.microsoft.com/office/mac/drawingml/2011/main" val="0"/>
+              <ma14:wrappingTextBoxFlag xmlns:ma14="http://schemas.microsoft.com/office/mac/drawingml/2011/main" xmlns="" val="0"/>
             </a:ext>
           </a:extLst>
         </p:spPr>
@@ -5492,7 +5391,7 @@
           <a:p>
             <a:pPr algn="l"/>
             <a:fld id="{F7021451-1387-4CA6-816F-3879F97B5CBC}" type="slidenum">
-              <a:rPr b="0" lang="en-US"/>
+              <a:rPr lang="en-US" b="0"/>
               <a:t>2</a:t>
             </a:fld>
             <a:endParaRPr lang="en-US"/>
@@ -5547,7 +5446,7 @@
           </a:bodyPr>
           <a:lstStyle/>
           <a:p>
-            <a:pPr indent="0" marL="0">
+            <a:pPr marL="0" indent="0">
               <a:buNone/>
             </a:pPr>
             <a:r>
@@ -5588,7 +5487,7 @@
           </a:bodyPr>
           <a:lstStyle/>
           <a:p>
-            <a:pPr indent="0" marL="0">
+            <a:pPr marL="0" indent="0">
               <a:buNone/>
             </a:pPr>
             <a:r>
@@ -5631,7 +5530,10 @@
         </p:spPr>
         <p:txBody>
           <a:bodyPr/>
-          <a:p/>
+          <a:lstStyle/>
+          <a:p>
+            <a:endParaRPr/>
+          </a:p>
         </p:txBody>
       </p:sp>
       <p:sp>
@@ -5660,7 +5562,10 @@
         </p:spPr>
         <p:txBody>
           <a:bodyPr/>
-          <a:p/>
+          <a:lstStyle/>
+          <a:p>
+            <a:endParaRPr/>
+          </a:p>
         </p:txBody>
       </p:sp>
       <p:sp>
@@ -5689,7 +5594,10 @@
         </p:spPr>
         <p:txBody>
           <a:bodyPr/>
-          <a:p/>
+          <a:lstStyle/>
+          <a:p>
+            <a:endParaRPr/>
+          </a:p>
         </p:txBody>
       </p:sp>
       <p:sp>
@@ -5718,7 +5626,10 @@
         </p:spPr>
         <p:txBody>
           <a:bodyPr/>
-          <a:p/>
+          <a:lstStyle/>
+          <a:p>
+            <a:endParaRPr/>
+          </a:p>
         </p:txBody>
       </p:sp>
       <p:sp>
@@ -5742,7 +5653,7 @@
           <a:bodyPr wrap="square" lIns="0" tIns="0" rIns="0" bIns="0" rtlCol="0" anchor="ctr"/>
           <a:lstStyle/>
           <a:p>
-            <a:pPr algn="ctr" indent="0" marL="0">
+            <a:pPr marL="0" indent="0" algn="ctr">
               <a:buNone/>
             </a:pPr>
             <a:r>
@@ -5778,7 +5689,7 @@
           <a:bodyPr wrap="square" lIns="0" tIns="0" rIns="0" bIns="0" rtlCol="0" anchor="ctr"/>
           <a:lstStyle/>
           <a:p>
-            <a:pPr algn="ctr" indent="0" marL="0">
+            <a:pPr marL="0" indent="0" algn="ctr">
               <a:buNone/>
             </a:pPr>
             <a:r>
@@ -5821,7 +5732,10 @@
         </p:spPr>
         <p:txBody>
           <a:bodyPr/>
-          <a:p/>
+          <a:lstStyle/>
+          <a:p>
+            <a:endParaRPr/>
+          </a:p>
         </p:txBody>
       </p:sp>
       <p:sp>
@@ -5850,7 +5764,10 @@
         </p:spPr>
         <p:txBody>
           <a:bodyPr/>
-          <a:p/>
+          <a:lstStyle/>
+          <a:p>
+            <a:endParaRPr/>
+          </a:p>
         </p:txBody>
       </p:sp>
       <p:sp>
@@ -5877,7 +5794,10 @@
         </p:spPr>
         <p:txBody>
           <a:bodyPr/>
-          <a:p/>
+          <a:lstStyle/>
+          <a:p>
+            <a:endParaRPr/>
+          </a:p>
         </p:txBody>
       </p:sp>
       <p:sp>
@@ -5904,7 +5824,10 @@
         </p:spPr>
         <p:txBody>
           <a:bodyPr/>
-          <a:p/>
+          <a:lstStyle/>
+          <a:p>
+            <a:endParaRPr/>
+          </a:p>
         </p:txBody>
       </p:sp>
       <p:sp>
@@ -5931,7 +5854,10 @@
         </p:spPr>
         <p:txBody>
           <a:bodyPr/>
-          <a:p/>
+          <a:lstStyle/>
+          <a:p>
+            <a:endParaRPr/>
+          </a:p>
         </p:txBody>
       </p:sp>
       <p:sp>
@@ -5955,7 +5881,7 @@
           <a:bodyPr wrap="square" lIns="0" tIns="0" rIns="0" bIns="0" rtlCol="0" anchor="ctr"/>
           <a:lstStyle/>
           <a:p>
-            <a:pPr indent="0" marL="0">
+            <a:pPr marL="0" indent="0">
               <a:buNone/>
             </a:pPr>
             <a:r>
@@ -5991,7 +5917,7 @@
           <a:bodyPr wrap="square" lIns="0" tIns="0" rIns="0" bIns="0" rtlCol="0" anchor="ctr"/>
           <a:lstStyle/>
           <a:p>
-            <a:pPr indent="0" marL="0">
+            <a:pPr marL="0" indent="0">
               <a:buNone/>
             </a:pPr>
             <a:r>
@@ -6015,7 +5941,7 @@
         <p:spPr>
           <a:xfrm>
             <a:off x="6080760" y="2743200"/>
-            <a:ext cx="-3840480" cy="393192"/>
+            <a:ext cx="0" cy="393192"/>
           </a:xfrm>
           <a:prstGeom prst="line">
             <a:avLst/>
@@ -6032,7 +5958,10 @@
         </p:spPr>
         <p:txBody>
           <a:bodyPr/>
-          <a:p/>
+          <a:lstStyle/>
+          <a:p>
+            <a:endParaRPr/>
+          </a:p>
         </p:txBody>
       </p:sp>
       <p:sp>
@@ -6063,7 +5992,10 @@
         </p:spPr>
         <p:txBody>
           <a:bodyPr/>
-          <a:p/>
+          <a:lstStyle/>
+          <a:p>
+            <a:endParaRPr/>
+          </a:p>
         </p:txBody>
       </p:sp>
       <p:sp>
@@ -6092,7 +6024,10 @@
         </p:spPr>
         <p:txBody>
           <a:bodyPr/>
-          <a:p/>
+          <a:lstStyle/>
+          <a:p>
+            <a:endParaRPr/>
+          </a:p>
         </p:txBody>
       </p:sp>
       <p:sp>
@@ -6119,7 +6054,10 @@
         </p:spPr>
         <p:txBody>
           <a:bodyPr/>
-          <a:p/>
+          <a:lstStyle/>
+          <a:p>
+            <a:endParaRPr/>
+          </a:p>
         </p:txBody>
       </p:sp>
       <p:sp>
@@ -6146,7 +6084,10 @@
         </p:spPr>
         <p:txBody>
           <a:bodyPr/>
-          <a:p/>
+          <a:lstStyle/>
+          <a:p>
+            <a:endParaRPr/>
+          </a:p>
         </p:txBody>
       </p:sp>
       <p:sp>
@@ -6173,7 +6114,10 @@
         </p:spPr>
         <p:txBody>
           <a:bodyPr/>
-          <a:p/>
+          <a:lstStyle/>
+          <a:p>
+            <a:endParaRPr/>
+          </a:p>
         </p:txBody>
       </p:sp>
       <p:sp>
@@ -6197,7 +6141,7 @@
           <a:bodyPr wrap="square" lIns="0" tIns="0" rIns="0" bIns="0" rtlCol="0" anchor="ctr"/>
           <a:lstStyle/>
           <a:p>
-            <a:pPr indent="0" marL="0">
+            <a:pPr marL="0" indent="0">
               <a:buNone/>
             </a:pPr>
             <a:r>
@@ -6233,7 +6177,7 @@
           <a:bodyPr wrap="square" lIns="0" tIns="0" rIns="0" bIns="0" rtlCol="0" anchor="ctr"/>
           <a:lstStyle/>
           <a:p>
-            <a:pPr indent="0" marL="0">
+            <a:pPr marL="0" indent="0">
               <a:buNone/>
             </a:pPr>
             <a:r>
@@ -6257,7 +6201,7 @@
         <p:spPr>
           <a:xfrm>
             <a:off x="6080760" y="2743200"/>
-            <a:ext cx="-777240" cy="393192"/>
+            <a:ext cx="0" cy="393192"/>
           </a:xfrm>
           <a:prstGeom prst="line">
             <a:avLst/>
@@ -6274,7 +6218,10 @@
         </p:spPr>
         <p:txBody>
           <a:bodyPr/>
-          <a:p/>
+          <a:lstStyle/>
+          <a:p>
+            <a:endParaRPr/>
+          </a:p>
         </p:txBody>
       </p:sp>
       <p:sp>
@@ -6305,7 +6252,10 @@
         </p:spPr>
         <p:txBody>
           <a:bodyPr/>
-          <a:p/>
+          <a:lstStyle/>
+          <a:p>
+            <a:endParaRPr/>
+          </a:p>
         </p:txBody>
       </p:sp>
       <p:sp>
@@ -6334,7 +6284,10 @@
         </p:spPr>
         <p:txBody>
           <a:bodyPr/>
-          <a:p/>
+          <a:lstStyle/>
+          <a:p>
+            <a:endParaRPr/>
+          </a:p>
         </p:txBody>
       </p:sp>
       <p:sp>
@@ -6361,7 +6314,10 @@
         </p:spPr>
         <p:txBody>
           <a:bodyPr/>
-          <a:p/>
+          <a:lstStyle/>
+          <a:p>
+            <a:endParaRPr/>
+          </a:p>
         </p:txBody>
       </p:sp>
       <p:sp>
@@ -6388,7 +6344,10 @@
         </p:spPr>
         <p:txBody>
           <a:bodyPr/>
-          <a:p/>
+          <a:lstStyle/>
+          <a:p>
+            <a:endParaRPr/>
+          </a:p>
         </p:txBody>
       </p:sp>
       <p:sp>
@@ -6415,7 +6374,10 @@
         </p:spPr>
         <p:txBody>
           <a:bodyPr/>
-          <a:p/>
+          <a:lstStyle/>
+          <a:p>
+            <a:endParaRPr/>
+          </a:p>
         </p:txBody>
       </p:sp>
       <p:sp>
@@ -6439,7 +6401,7 @@
           <a:bodyPr wrap="square" lIns="0" tIns="0" rIns="0" bIns="0" rtlCol="0" anchor="ctr"/>
           <a:lstStyle/>
           <a:p>
-            <a:pPr indent="0" marL="0">
+            <a:pPr marL="0" indent="0">
               <a:buNone/>
             </a:pPr>
             <a:r>
@@ -6475,7 +6437,7 @@
           <a:bodyPr wrap="square" lIns="0" tIns="0" rIns="0" bIns="0" rtlCol="0" anchor="ctr"/>
           <a:lstStyle/>
           <a:p>
-            <a:pPr indent="0" marL="0">
+            <a:pPr marL="0" indent="0">
               <a:buNone/>
             </a:pPr>
             <a:r>
@@ -6516,7 +6478,10 @@
         </p:spPr>
         <p:txBody>
           <a:bodyPr/>
-          <a:p/>
+          <a:lstStyle/>
+          <a:p>
+            <a:endParaRPr/>
+          </a:p>
         </p:txBody>
       </p:sp>
       <p:sp>
@@ -6547,7 +6512,10 @@
         </p:spPr>
         <p:txBody>
           <a:bodyPr/>
-          <a:p/>
+          <a:lstStyle/>
+          <a:p>
+            <a:endParaRPr/>
+          </a:p>
         </p:txBody>
       </p:sp>
       <p:sp>
@@ -6578,7 +6546,10 @@
         </p:spPr>
         <p:txBody>
           <a:bodyPr/>
-          <a:p/>
+          <a:lstStyle/>
+          <a:p>
+            <a:endParaRPr/>
+          </a:p>
         </p:txBody>
       </p:sp>
       <p:sp>
@@ -6604,7 +6575,7 @@
           </a:bodyPr>
           <a:lstStyle/>
           <a:p>
-            <a:pPr algn="ctr" indent="0" marL="0">
+            <a:pPr marL="0" indent="0" algn="ctr">
               <a:buNone/>
             </a:pPr>
             <a:r>
@@ -6642,7 +6613,7 @@
           </a:bodyPr>
           <a:lstStyle/>
           <a:p>
-            <a:pPr indent="0" marL="0">
+            <a:pPr marL="0" indent="0">
               <a:buNone/>
             </a:pPr>
             <a:r>
@@ -6657,9 +6628,6 @@
               <a:t>{
 </a:t>
             </a:r>
-            <a:pPr indent="0" marL="0">
-              <a:buNone/>
-            </a:pPr>
             <a:r>
               <a:rPr lang="en-US" sz="850" dirty="0">
                 <a:solidFill>
@@ -6670,21 +6638,7 @@
                 <a:cs typeface="Cascadia Mono" pitchFamily="34" charset="-120"/>
               </a:rPr>
               <a:t>  _id, fields, ...
-</a:t>
-            </a:r>
-            <a:pPr indent="0" marL="0">
-              <a:buNone/>
-            </a:pPr>
-            <a:r>
-              <a:rPr lang="en-US" sz="850" dirty="0">
-                <a:solidFill>
-                  <a:srgbClr val="B6C2BC"/>
-                </a:solidFill>
-                <a:latin typeface="Cascadia Mono" pitchFamily="34" charset="0"/>
-                <a:ea typeface="Cascadia Mono" pitchFamily="34" charset="-122"/>
-                <a:cs typeface="Cascadia Mono" pitchFamily="34" charset="-120"/>
-              </a:rPr>
-              <a:t>}</a:t>
+}</a:t>
             </a:r>
             <a:endParaRPr lang="en-US" sz="850" dirty="0"/>
           </a:p>
@@ -6699,7 +6653,7 @@
         <p:spPr>
           <a:xfrm>
             <a:off x="2240280" y="3931920"/>
-            <a:ext cx="-91440" cy="393192"/>
+            <a:ext cx="0" cy="393192"/>
           </a:xfrm>
           <a:prstGeom prst="line">
             <a:avLst/>
@@ -6716,7 +6670,10 @@
         </p:spPr>
         <p:txBody>
           <a:bodyPr/>
-          <a:p/>
+          <a:lstStyle/>
+          <a:p>
+            <a:endParaRPr/>
+          </a:p>
         </p:txBody>
       </p:sp>
       <p:sp>
@@ -6747,7 +6704,10 @@
         </p:spPr>
         <p:txBody>
           <a:bodyPr/>
-          <a:p/>
+          <a:lstStyle/>
+          <a:p>
+            <a:endParaRPr/>
+          </a:p>
         </p:txBody>
       </p:sp>
       <p:sp>
@@ -6778,7 +6738,10 @@
         </p:spPr>
         <p:txBody>
           <a:bodyPr/>
-          <a:p/>
+          <a:lstStyle/>
+          <a:p>
+            <a:endParaRPr/>
+          </a:p>
         </p:txBody>
       </p:sp>
       <p:sp>
@@ -6804,7 +6767,7 @@
           </a:bodyPr>
           <a:lstStyle/>
           <a:p>
-            <a:pPr algn="ctr" indent="0" marL="0">
+            <a:pPr marL="0" indent="0" algn="ctr">
               <a:buNone/>
             </a:pPr>
             <a:r>
@@ -6842,7 +6805,7 @@
           </a:bodyPr>
           <a:lstStyle/>
           <a:p>
-            <a:pPr indent="0" marL="0">
+            <a:pPr marL="0" indent="0">
               <a:buNone/>
             </a:pPr>
             <a:r>
@@ -6857,9 +6820,6 @@
               <a:t>{
 </a:t>
             </a:r>
-            <a:pPr indent="0" marL="0">
-              <a:buNone/>
-            </a:pPr>
             <a:r>
               <a:rPr lang="en-US" sz="850" dirty="0">
                 <a:solidFill>
@@ -6870,21 +6830,7 @@
                 <a:cs typeface="Cascadia Mono" pitchFamily="34" charset="-120"/>
               </a:rPr>
               <a:t>  _id, fields, ...
-</a:t>
-            </a:r>
-            <a:pPr indent="0" marL="0">
-              <a:buNone/>
-            </a:pPr>
-            <a:r>
-              <a:rPr lang="en-US" sz="850" dirty="0">
-                <a:solidFill>
-                  <a:srgbClr val="B6C2BC"/>
-                </a:solidFill>
-                <a:latin typeface="Cascadia Mono" pitchFamily="34" charset="0"/>
-                <a:ea typeface="Cascadia Mono" pitchFamily="34" charset="-122"/>
-                <a:cs typeface="Cascadia Mono" pitchFamily="34" charset="-120"/>
-              </a:rPr>
-              <a:t>}</a:t>
+}</a:t>
             </a:r>
             <a:endParaRPr lang="en-US" sz="850" dirty="0"/>
           </a:p>
@@ -6899,7 +6845,7 @@
         <p:spPr>
           <a:xfrm>
             <a:off x="5303520" y="3931920"/>
-            <a:ext cx="-91440" cy="393192"/>
+            <a:ext cx="0" cy="393192"/>
           </a:xfrm>
           <a:prstGeom prst="line">
             <a:avLst/>
@@ -6916,7 +6862,10 @@
         </p:spPr>
         <p:txBody>
           <a:bodyPr/>
-          <a:p/>
+          <a:lstStyle/>
+          <a:p>
+            <a:endParaRPr/>
+          </a:p>
         </p:txBody>
       </p:sp>
       <p:sp>
@@ -6947,7 +6896,10 @@
         </p:spPr>
         <p:txBody>
           <a:bodyPr/>
-          <a:p/>
+          <a:lstStyle/>
+          <a:p>
+            <a:endParaRPr/>
+          </a:p>
         </p:txBody>
       </p:sp>
       <p:sp>
@@ -6978,7 +6930,10 @@
         </p:spPr>
         <p:txBody>
           <a:bodyPr/>
-          <a:p/>
+          <a:lstStyle/>
+          <a:p>
+            <a:endParaRPr/>
+          </a:p>
         </p:txBody>
       </p:sp>
       <p:sp>
@@ -7004,7 +6959,7 @@
           </a:bodyPr>
           <a:lstStyle/>
           <a:p>
-            <a:pPr algn="ctr" indent="0" marL="0">
+            <a:pPr marL="0" indent="0" algn="ctr">
               <a:buNone/>
             </a:pPr>
             <a:r>
@@ -7042,7 +6997,7 @@
           </a:bodyPr>
           <a:lstStyle/>
           <a:p>
-            <a:pPr indent="0" marL="0">
+            <a:pPr marL="0" indent="0">
               <a:buNone/>
             </a:pPr>
             <a:r>
@@ -7057,9 +7012,6 @@
               <a:t>{
 </a:t>
             </a:r>
-            <a:pPr indent="0" marL="0">
-              <a:buNone/>
-            </a:pPr>
             <a:r>
               <a:rPr lang="en-US" sz="850" dirty="0">
                 <a:solidFill>
@@ -7070,21 +7022,7 @@
                 <a:cs typeface="Cascadia Mono" pitchFamily="34" charset="-120"/>
               </a:rPr>
               <a:t>  _id, fields, ...
-</a:t>
-            </a:r>
-            <a:pPr indent="0" marL="0">
-              <a:buNone/>
-            </a:pPr>
-            <a:r>
-              <a:rPr lang="en-US" sz="850" dirty="0">
-                <a:solidFill>
-                  <a:srgbClr val="B6C2BC"/>
-                </a:solidFill>
-                <a:latin typeface="Cascadia Mono" pitchFamily="34" charset="0"/>
-                <a:ea typeface="Cascadia Mono" pitchFamily="34" charset="-122"/>
-                <a:cs typeface="Cascadia Mono" pitchFamily="34" charset="-120"/>
-              </a:rPr>
-              <a:t>}</a:t>
+}</a:t>
             </a:r>
             <a:endParaRPr lang="en-US" sz="850" dirty="0"/>
           </a:p>
@@ -7099,7 +7037,7 @@
         <p:spPr>
           <a:xfrm>
             <a:off x="8366760" y="3931920"/>
-            <a:ext cx="-91440" cy="393192"/>
+            <a:ext cx="0" cy="393192"/>
           </a:xfrm>
           <a:prstGeom prst="line">
             <a:avLst/>
@@ -7116,7 +7054,10 @@
         </p:spPr>
         <p:txBody>
           <a:bodyPr/>
-          <a:p/>
+          <a:lstStyle/>
+          <a:p>
+            <a:endParaRPr/>
+          </a:p>
         </p:txBody>
       </p:sp>
       <p:sp>
@@ -7147,7 +7088,10 @@
         </p:spPr>
         <p:txBody>
           <a:bodyPr/>
-          <a:p/>
+          <a:lstStyle/>
+          <a:p>
+            <a:endParaRPr/>
+          </a:p>
         </p:txBody>
       </p:sp>
       <p:sp>
@@ -7173,7 +7117,7 @@
           </a:bodyPr>
           <a:lstStyle/>
           <a:p>
-            <a:pPr algn="ctr" indent="0" marL="0">
+            <a:pPr marL="0" indent="0" algn="ctr">
               <a:buNone/>
             </a:pPr>
             <a:r>
@@ -7211,7 +7155,7 @@
           </a:bodyPr>
           <a:lstStyle/>
           <a:p>
-            <a:pPr algn="ctr" indent="0" marL="0">
+            <a:pPr marL="0" indent="0" algn="ctr">
               <a:buNone/>
             </a:pPr>
             <a:r>
@@ -7249,7 +7193,7 @@
           </a:bodyPr>
           <a:lstStyle/>
           <a:p>
-            <a:pPr indent="0" marL="0">
+            <a:pPr marL="0" indent="0">
               <a:buNone/>
             </a:pPr>
             <a:r>
@@ -7266,7 +7210,7 @@
       </p:sp>
       <p:sp>
         <p:nvSpPr>
-          <p:cNvPr id="25" name="Slide Number Placeholder 0"/>
+          <p:cNvPr id="53" name="Slide Number Placeholder 0"/>
           <p:cNvSpPr>
             <a:spLocks noGrp="1"/>
           </p:cNvSpPr>
@@ -7285,7 +7229,7 @@
           <a:ln/>
           <a:extLst>
             <a:ext uri="{C572A759-6A51-4108-AA02-DFA0A04FC94B}">
-              <ma14:wrappingTextBoxFlag xmlns:ma14="http://schemas.microsoft.com/office/mac/drawingml/2011/main" val="0"/>
+              <ma14:wrappingTextBoxFlag xmlns:ma14="http://schemas.microsoft.com/office/mac/drawingml/2011/main" xmlns="" val="0"/>
             </a:ext>
           </a:extLst>
         </p:spPr>
@@ -7303,7 +7247,7 @@
           <a:p>
             <a:pPr algn="l"/>
             <a:fld id="{F7021451-1387-4CA6-816F-3879F97B5CBC}" type="slidenum">
-              <a:rPr b="0" lang="en-US"/>
+              <a:rPr lang="en-US" b="0"/>
               <a:t>3</a:t>
             </a:fld>
             <a:endParaRPr lang="en-US"/>
@@ -7358,7 +7302,7 @@
           </a:bodyPr>
           <a:lstStyle/>
           <a:p>
-            <a:pPr indent="0" marL="0">
+            <a:pPr marL="0" indent="0">
               <a:buNone/>
             </a:pPr>
             <a:r>
@@ -7399,7 +7343,7 @@
           </a:bodyPr>
           <a:lstStyle/>
           <a:p>
-            <a:pPr indent="0" marL="0">
+            <a:pPr marL="0" indent="0">
               <a:buNone/>
             </a:pPr>
             <a:r>
@@ -7442,7 +7386,10 @@
         </p:spPr>
         <p:txBody>
           <a:bodyPr/>
-          <a:p/>
+          <a:lstStyle/>
+          <a:p>
+            <a:endParaRPr/>
+          </a:p>
         </p:txBody>
       </p:sp>
       <p:sp>
@@ -7471,7 +7418,10 @@
         </p:spPr>
         <p:txBody>
           <a:bodyPr/>
-          <a:p/>
+          <a:lstStyle/>
+          <a:p>
+            <a:endParaRPr/>
+          </a:p>
         </p:txBody>
       </p:sp>
       <p:sp>
@@ -7500,7 +7450,10 @@
         </p:spPr>
         <p:txBody>
           <a:bodyPr/>
-          <a:p/>
+          <a:lstStyle/>
+          <a:p>
+            <a:endParaRPr/>
+          </a:p>
         </p:txBody>
       </p:sp>
       <p:sp>
@@ -7529,7 +7482,10 @@
         </p:spPr>
         <p:txBody>
           <a:bodyPr/>
-          <a:p/>
+          <a:lstStyle/>
+          <a:p>
+            <a:endParaRPr/>
+          </a:p>
         </p:txBody>
       </p:sp>
       <p:sp>
@@ -7553,7 +7509,7 @@
           <a:bodyPr wrap="square" lIns="0" tIns="0" rIns="0" bIns="0" rtlCol="0" anchor="ctr"/>
           <a:lstStyle/>
           <a:p>
-            <a:pPr indent="0" marL="0">
+            <a:pPr marL="0" indent="0">
               <a:buNone/>
             </a:pPr>
             <a:r>
@@ -7591,7 +7547,7 @@
           </a:bodyPr>
           <a:lstStyle/>
           <a:p>
-            <a:pPr indent="0" marL="0">
+            <a:pPr marL="0" indent="0">
               <a:buNone/>
             </a:pPr>
             <a:r>
@@ -7632,7 +7588,10 @@
         </p:spPr>
         <p:txBody>
           <a:bodyPr/>
-          <a:p/>
+          <a:lstStyle/>
+          <a:p>
+            <a:endParaRPr/>
+          </a:p>
         </p:txBody>
       </p:sp>
       <p:sp>
@@ -7658,7 +7617,7 @@
           </a:bodyPr>
           <a:lstStyle/>
           <a:p>
-            <a:pPr algn="ctr" indent="0" marL="0">
+            <a:pPr marL="0" indent="0" algn="ctr">
               <a:buNone/>
             </a:pPr>
             <a:r>
@@ -7696,7 +7655,7 @@
           </a:bodyPr>
           <a:lstStyle/>
           <a:p>
-            <a:pPr indent="0" marL="0">
+            <a:pPr marL="0" indent="0">
               <a:buNone/>
             </a:pPr>
             <a:r>
@@ -7737,7 +7696,10 @@
         </p:spPr>
         <p:txBody>
           <a:bodyPr/>
-          <a:p/>
+          <a:lstStyle/>
+          <a:p>
+            <a:endParaRPr/>
+          </a:p>
         </p:txBody>
       </p:sp>
       <p:sp>
@@ -7763,7 +7725,7 @@
           </a:bodyPr>
           <a:lstStyle/>
           <a:p>
-            <a:pPr algn="ctr" indent="0" marL="0">
+            <a:pPr marL="0" indent="0" algn="ctr">
               <a:buNone/>
             </a:pPr>
             <a:r>
@@ -7801,7 +7763,7 @@
           </a:bodyPr>
           <a:lstStyle/>
           <a:p>
-            <a:pPr indent="0" marL="0">
+            <a:pPr marL="0" indent="0">
               <a:buNone/>
             </a:pPr>
             <a:r>
@@ -7842,7 +7804,10 @@
         </p:spPr>
         <p:txBody>
           <a:bodyPr/>
-          <a:p/>
+          <a:lstStyle/>
+          <a:p>
+            <a:endParaRPr/>
+          </a:p>
         </p:txBody>
       </p:sp>
       <p:sp>
@@ -7868,7 +7833,7 @@
           </a:bodyPr>
           <a:lstStyle/>
           <a:p>
-            <a:pPr algn="ctr" indent="0" marL="0">
+            <a:pPr marL="0" indent="0" algn="ctr">
               <a:buNone/>
             </a:pPr>
             <a:r>
@@ -7906,7 +7871,7 @@
           </a:bodyPr>
           <a:lstStyle/>
           <a:p>
-            <a:pPr indent="0" marL="0">
+            <a:pPr marL="0" indent="0">
               <a:buNone/>
             </a:pPr>
             <a:r>
@@ -7947,7 +7912,10 @@
         </p:spPr>
         <p:txBody>
           <a:bodyPr/>
-          <a:p/>
+          <a:lstStyle/>
+          <a:p>
+            <a:endParaRPr/>
+          </a:p>
         </p:txBody>
       </p:sp>
       <p:sp>
@@ -7973,7 +7941,7 @@
           </a:bodyPr>
           <a:lstStyle/>
           <a:p>
-            <a:pPr algn="ctr" indent="0" marL="0">
+            <a:pPr marL="0" indent="0" algn="ctr">
               <a:buNone/>
             </a:pPr>
             <a:r>
@@ -8011,7 +7979,7 @@
           </a:bodyPr>
           <a:lstStyle/>
           <a:p>
-            <a:pPr indent="0" marL="0">
+            <a:pPr marL="0" indent="0">
               <a:buNone/>
             </a:pPr>
             <a:r>
@@ -8054,7 +8022,10 @@
         </p:spPr>
         <p:txBody>
           <a:bodyPr/>
-          <a:p/>
+          <a:lstStyle/>
+          <a:p>
+            <a:endParaRPr/>
+          </a:p>
         </p:txBody>
       </p:sp>
       <p:sp>
@@ -8085,7 +8056,10 @@
         </p:spPr>
         <p:txBody>
           <a:bodyPr/>
-          <a:p/>
+          <a:lstStyle/>
+          <a:p>
+            <a:endParaRPr/>
+          </a:p>
         </p:txBody>
       </p:sp>
       <p:sp>
@@ -8111,7 +8085,7 @@
           </a:bodyPr>
           <a:lstStyle/>
           <a:p>
-            <a:pPr indent="0" marL="0">
+            <a:pPr marL="0" indent="0">
               <a:buNone/>
             </a:pPr>
             <a:r>
@@ -8149,7 +8123,7 @@
           </a:bodyPr>
           <a:lstStyle/>
           <a:p>
-            <a:pPr indent="0" marL="0">
+            <a:pPr marL="0" indent="0">
               <a:buNone/>
             </a:pPr>
             <a:r>
@@ -8164,9 +8138,6 @@
               <a:t>// switch to the application database
 </a:t>
             </a:r>
-            <a:pPr indent="0" marL="0">
-              <a:buNone/>
-            </a:pPr>
             <a:r>
               <a:rPr lang="en-US" sz="1030" dirty="0">
                 <a:solidFill>
@@ -8179,9 +8150,6 @@
               <a:t>use orderdb
 </a:t>
             </a:r>
-            <a:pPr indent="0" marL="0">
-              <a:buNone/>
-            </a:pPr>
             <a:r>
               <a:rPr lang="en-US" sz="1030" dirty="0">
                 <a:solidFill>
@@ -8194,9 +8162,6 @@
               <a:t>[object Object]
 </a:t>
             </a:r>
-            <a:pPr indent="0" marL="0">
-              <a:buNone/>
-            </a:pPr>
             <a:r>
               <a:rPr lang="en-US" sz="1030" dirty="0">
                 <a:solidFill>
@@ -8209,9 +8174,6 @@
               <a:t>// inspect the current database
 </a:t>
             </a:r>
-            <a:pPr indent="0" marL="0">
-              <a:buNone/>
-            </a:pPr>
             <a:r>
               <a:rPr lang="en-US" sz="1030" dirty="0">
                 <a:solidFill>
@@ -8224,9 +8186,6 @@
               <a:t>db.getName()
 </a:t>
             </a:r>
-            <a:pPr indent="0" marL="0">
-              <a:buNone/>
-            </a:pPr>
             <a:r>
               <a:rPr lang="en-US" sz="1030" dirty="0">
                 <a:solidFill>
@@ -8239,9 +8198,6 @@
               <a:t>[object Object]
 </a:t>
             </a:r>
-            <a:pPr indent="0" marL="0">
-              <a:buNone/>
-            </a:pPr>
             <a:r>
               <a:rPr lang="en-US" sz="1030" dirty="0">
                 <a:solidFill>
@@ -8254,9 +8210,6 @@
               <a:t>// list databases (when permitted)
 </a:t>
             </a:r>
-            <a:pPr indent="0" marL="0">
-              <a:buNone/>
-            </a:pPr>
             <a:r>
               <a:rPr lang="en-US" sz="1030" dirty="0">
                 <a:solidFill>
@@ -8300,7 +8253,10 @@
         </p:spPr>
         <p:txBody>
           <a:bodyPr/>
-          <a:p/>
+          <a:lstStyle/>
+          <a:p>
+            <a:endParaRPr/>
+          </a:p>
         </p:txBody>
       </p:sp>
       <p:sp>
@@ -8324,7 +8280,7 @@
           <a:bodyPr wrap="square" lIns="0" tIns="0" rIns="0" bIns="0" rtlCol="0" anchor="ctr"/>
           <a:lstStyle/>
           <a:p>
-            <a:pPr indent="0" marL="0">
+            <a:pPr marL="0" indent="0">
               <a:buNone/>
             </a:pPr>
             <a:r>
@@ -8362,7 +8318,7 @@
           </a:bodyPr>
           <a:lstStyle/>
           <a:p>
-            <a:pPr indent="0" marL="0">
+            <a:pPr marL="0" indent="0">
               <a:buNone/>
             </a:pPr>
             <a:r>
@@ -8400,7 +8356,7 @@
           </a:bodyPr>
           <a:lstStyle/>
           <a:p>
-            <a:pPr indent="0" marL="0">
+            <a:pPr marL="0" indent="0">
               <a:buNone/>
             </a:pPr>
             <a:r>
@@ -8417,7 +8373,7 @@
       </p:sp>
       <p:sp>
         <p:nvSpPr>
-          <p:cNvPr id="25" name="Slide Number Placeholder 0"/>
+          <p:cNvPr id="30" name="Slide Number Placeholder 0"/>
           <p:cNvSpPr>
             <a:spLocks noGrp="1"/>
           </p:cNvSpPr>
@@ -8436,7 +8392,7 @@
           <a:ln/>
           <a:extLst>
             <a:ext uri="{C572A759-6A51-4108-AA02-DFA0A04FC94B}">
-              <ma14:wrappingTextBoxFlag xmlns:ma14="http://schemas.microsoft.com/office/mac/drawingml/2011/main" val="0"/>
+              <ma14:wrappingTextBoxFlag xmlns:ma14="http://schemas.microsoft.com/office/mac/drawingml/2011/main" xmlns="" val="0"/>
             </a:ext>
           </a:extLst>
         </p:spPr>
@@ -8454,7 +8410,7 @@
           <a:p>
             <a:pPr algn="l"/>
             <a:fld id="{F7021451-1387-4CA6-816F-3879F97B5CBC}" type="slidenum">
-              <a:rPr b="0" lang="en-US"/>
+              <a:rPr lang="en-US" b="0"/>
               <a:t>4</a:t>
             </a:fld>
             <a:endParaRPr lang="en-US"/>
@@ -8509,7 +8465,7 @@
           </a:bodyPr>
           <a:lstStyle/>
           <a:p>
-            <a:pPr indent="0" marL="0">
+            <a:pPr marL="0" indent="0">
               <a:buNone/>
             </a:pPr>
             <a:r>
@@ -8550,7 +8506,7 @@
           </a:bodyPr>
           <a:lstStyle/>
           <a:p>
-            <a:pPr indent="0" marL="0">
+            <a:pPr marL="0" indent="0">
               <a:buNone/>
             </a:pPr>
             <a:r>
@@ -8593,7 +8549,10 @@
         </p:spPr>
         <p:txBody>
           <a:bodyPr/>
-          <a:p/>
+          <a:lstStyle/>
+          <a:p>
+            <a:endParaRPr/>
+          </a:p>
         </p:txBody>
       </p:sp>
       <p:sp>
@@ -8622,7 +8581,10 @@
         </p:spPr>
         <p:txBody>
           <a:bodyPr/>
-          <a:p/>
+          <a:lstStyle/>
+          <a:p>
+            <a:endParaRPr/>
+          </a:p>
         </p:txBody>
       </p:sp>
       <p:sp>
@@ -8649,7 +8611,10 @@
         </p:spPr>
         <p:txBody>
           <a:bodyPr/>
-          <a:p/>
+          <a:lstStyle/>
+          <a:p>
+            <a:endParaRPr/>
+          </a:p>
         </p:txBody>
       </p:sp>
       <p:sp>
@@ -8676,7 +8641,10 @@
         </p:spPr>
         <p:txBody>
           <a:bodyPr/>
-          <a:p/>
+          <a:lstStyle/>
+          <a:p>
+            <a:endParaRPr/>
+          </a:p>
         </p:txBody>
       </p:sp>
       <p:sp>
@@ -8703,7 +8671,10 @@
         </p:spPr>
         <p:txBody>
           <a:bodyPr/>
-          <a:p/>
+          <a:lstStyle/>
+          <a:p>
+            <a:endParaRPr/>
+          </a:p>
         </p:txBody>
       </p:sp>
       <p:sp>
@@ -8727,7 +8698,7 @@
           <a:bodyPr wrap="square" lIns="0" tIns="0" rIns="0" bIns="0" rtlCol="0" anchor="ctr"/>
           <a:lstStyle/>
           <a:p>
-            <a:pPr algn="ctr" indent="0" marL="0">
+            <a:pPr marL="0" indent="0" algn="ctr">
               <a:buNone/>
             </a:pPr>
             <a:r>
@@ -8765,7 +8736,7 @@
           </a:bodyPr>
           <a:lstStyle/>
           <a:p>
-            <a:pPr algn="ctr" indent="0" marL="0">
+            <a:pPr marL="0" indent="0" algn="ctr">
               <a:buNone/>
             </a:pPr>
             <a:r>
@@ -8808,7 +8779,10 @@
         </p:spPr>
         <p:txBody>
           <a:bodyPr/>
-          <a:p/>
+          <a:lstStyle/>
+          <a:p>
+            <a:endParaRPr/>
+          </a:p>
         </p:txBody>
       </p:sp>
       <p:sp>
@@ -8839,7 +8813,10 @@
         </p:spPr>
         <p:txBody>
           <a:bodyPr/>
-          <a:p/>
+          <a:lstStyle/>
+          <a:p>
+            <a:endParaRPr/>
+          </a:p>
         </p:txBody>
       </p:sp>
       <p:sp>
@@ -8865,7 +8842,7 @@
           </a:bodyPr>
           <a:lstStyle/>
           <a:p>
-            <a:pPr algn="ctr" indent="0" marL="0">
+            <a:pPr marL="0" indent="0" algn="ctr">
               <a:buNone/>
             </a:pPr>
             <a:r>
@@ -8903,7 +8880,7 @@
           </a:bodyPr>
           <a:lstStyle/>
           <a:p>
-            <a:pPr indent="0" marL="0">
+            <a:pPr marL="0" indent="0">
               <a:buNone/>
             </a:pPr>
             <a:r>
@@ -8918,9 +8895,6 @@
               <a:t>{
 </a:t>
             </a:r>
-            <a:pPr indent="0" marL="0">
-              <a:buNone/>
-            </a:pPr>
             <a:r>
               <a:rPr lang="en-US" sz="850" dirty="0">
                 <a:solidFill>
@@ -8931,21 +8905,7 @@
                 <a:cs typeface="Cascadia Mono" pitchFamily="34" charset="-120"/>
               </a:rPr>
               <a:t>  ...
-</a:t>
-            </a:r>
-            <a:pPr indent="0" marL="0">
-              <a:buNone/>
-            </a:pPr>
-            <a:r>
-              <a:rPr lang="en-US" sz="850" dirty="0">
-                <a:solidFill>
-                  <a:srgbClr val="B6C2BC"/>
-                </a:solidFill>
-                <a:latin typeface="Cascadia Mono" pitchFamily="34" charset="0"/>
-                <a:ea typeface="Cascadia Mono" pitchFamily="34" charset="-122"/>
-                <a:cs typeface="Cascadia Mono" pitchFamily="34" charset="-120"/>
-              </a:rPr>
-              <a:t>}</a:t>
+}</a:t>
             </a:r>
             <a:endParaRPr lang="en-US" sz="850" dirty="0"/>
           </a:p>
@@ -8960,7 +8920,7 @@
         <p:spPr>
           <a:xfrm>
             <a:off x="1746504" y="3493008"/>
-            <a:ext cx="0" cy="-173736"/>
+            <a:ext cx="0" cy="0"/>
           </a:xfrm>
           <a:prstGeom prst="line">
             <a:avLst/>
@@ -8977,7 +8937,10 @@
         </p:spPr>
         <p:txBody>
           <a:bodyPr/>
-          <a:p/>
+          <a:lstStyle/>
+          <a:p>
+            <a:endParaRPr/>
+          </a:p>
         </p:txBody>
       </p:sp>
       <p:sp>
@@ -9008,7 +8971,10 @@
         </p:spPr>
         <p:txBody>
           <a:bodyPr/>
-          <a:p/>
+          <a:lstStyle/>
+          <a:p>
+            <a:endParaRPr/>
+          </a:p>
         </p:txBody>
       </p:sp>
       <p:sp>
@@ -9037,7 +9003,10 @@
         </p:spPr>
         <p:txBody>
           <a:bodyPr/>
-          <a:p/>
+          <a:lstStyle/>
+          <a:p>
+            <a:endParaRPr/>
+          </a:p>
         </p:txBody>
       </p:sp>
       <p:sp>
@@ -9064,7 +9033,10 @@
         </p:spPr>
         <p:txBody>
           <a:bodyPr/>
-          <a:p/>
+          <a:lstStyle/>
+          <a:p>
+            <a:endParaRPr/>
+          </a:p>
         </p:txBody>
       </p:sp>
       <p:sp>
@@ -9091,7 +9063,10 @@
         </p:spPr>
         <p:txBody>
           <a:bodyPr/>
-          <a:p/>
+          <a:lstStyle/>
+          <a:p>
+            <a:endParaRPr/>
+          </a:p>
         </p:txBody>
       </p:sp>
       <p:sp>
@@ -9118,7 +9093,10 @@
         </p:spPr>
         <p:txBody>
           <a:bodyPr/>
-          <a:p/>
+          <a:lstStyle/>
+          <a:p>
+            <a:endParaRPr/>
+          </a:p>
         </p:txBody>
       </p:sp>
       <p:sp>
@@ -9142,7 +9120,7 @@
           <a:bodyPr wrap="square" lIns="0" tIns="0" rIns="0" bIns="0" rtlCol="0" anchor="ctr"/>
           <a:lstStyle/>
           <a:p>
-            <a:pPr algn="ctr" indent="0" marL="0">
+            <a:pPr marL="0" indent="0" algn="ctr">
               <a:buNone/>
             </a:pPr>
             <a:r>
@@ -9180,7 +9158,7 @@
           </a:bodyPr>
           <a:lstStyle/>
           <a:p>
-            <a:pPr algn="ctr" indent="0" marL="0">
+            <a:pPr marL="0" indent="0" algn="ctr">
               <a:buNone/>
             </a:pPr>
             <a:r>
@@ -9223,7 +9201,10 @@
         </p:spPr>
         <p:txBody>
           <a:bodyPr/>
-          <a:p/>
+          <a:lstStyle/>
+          <a:p>
+            <a:endParaRPr/>
+          </a:p>
         </p:txBody>
       </p:sp>
       <p:sp>
@@ -9254,7 +9235,10 @@
         </p:spPr>
         <p:txBody>
           <a:bodyPr/>
-          <a:p/>
+          <a:lstStyle/>
+          <a:p>
+            <a:endParaRPr/>
+          </a:p>
         </p:txBody>
       </p:sp>
       <p:sp>
@@ -9280,7 +9264,7 @@
           </a:bodyPr>
           <a:lstStyle/>
           <a:p>
-            <a:pPr algn="ctr" indent="0" marL="0">
+            <a:pPr marL="0" indent="0" algn="ctr">
               <a:buNone/>
             </a:pPr>
             <a:r>
@@ -9318,7 +9302,7 @@
           </a:bodyPr>
           <a:lstStyle/>
           <a:p>
-            <a:pPr indent="0" marL="0">
+            <a:pPr marL="0" indent="0">
               <a:buNone/>
             </a:pPr>
             <a:r>
@@ -9333,9 +9317,6 @@
               <a:t>{
 </a:t>
             </a:r>
-            <a:pPr indent="0" marL="0">
-              <a:buNone/>
-            </a:pPr>
             <a:r>
               <a:rPr lang="en-US" sz="850" dirty="0">
                 <a:solidFill>
@@ -9346,21 +9327,7 @@
                 <a:cs typeface="Cascadia Mono" pitchFamily="34" charset="-120"/>
               </a:rPr>
               <a:t>  ...
-</a:t>
-            </a:r>
-            <a:pPr indent="0" marL="0">
-              <a:buNone/>
-            </a:pPr>
-            <a:r>
-              <a:rPr lang="en-US" sz="850" dirty="0">
-                <a:solidFill>
-                  <a:srgbClr val="B6C2BC"/>
-                </a:solidFill>
-                <a:latin typeface="Cascadia Mono" pitchFamily="34" charset="0"/>
-                <a:ea typeface="Cascadia Mono" pitchFamily="34" charset="-122"/>
-                <a:cs typeface="Cascadia Mono" pitchFamily="34" charset="-120"/>
-              </a:rPr>
-              <a:t>}</a:t>
+}</a:t>
             </a:r>
             <a:endParaRPr lang="en-US" sz="850" dirty="0"/>
           </a:p>
@@ -9375,7 +9342,7 @@
         <p:spPr>
           <a:xfrm>
             <a:off x="4325112" y="3493008"/>
-            <a:ext cx="0" cy="-173736"/>
+            <a:ext cx="0" cy="0"/>
           </a:xfrm>
           <a:prstGeom prst="line">
             <a:avLst/>
@@ -9392,7 +9359,10 @@
         </p:spPr>
         <p:txBody>
           <a:bodyPr/>
-          <a:p/>
+          <a:lstStyle/>
+          <a:p>
+            <a:endParaRPr/>
+          </a:p>
         </p:txBody>
       </p:sp>
       <p:sp>
@@ -9423,7 +9393,10 @@
         </p:spPr>
         <p:txBody>
           <a:bodyPr/>
-          <a:p/>
+          <a:lstStyle/>
+          <a:p>
+            <a:endParaRPr/>
+          </a:p>
         </p:txBody>
       </p:sp>
       <p:sp>
@@ -9452,7 +9425,10 @@
         </p:spPr>
         <p:txBody>
           <a:bodyPr/>
-          <a:p/>
+          <a:lstStyle/>
+          <a:p>
+            <a:endParaRPr/>
+          </a:p>
         </p:txBody>
       </p:sp>
       <p:sp>
@@ -9479,7 +9455,10 @@
         </p:spPr>
         <p:txBody>
           <a:bodyPr/>
-          <a:p/>
+          <a:lstStyle/>
+          <a:p>
+            <a:endParaRPr/>
+          </a:p>
         </p:txBody>
       </p:sp>
       <p:sp>
@@ -9506,7 +9485,10 @@
         </p:spPr>
         <p:txBody>
           <a:bodyPr/>
-          <a:p/>
+          <a:lstStyle/>
+          <a:p>
+            <a:endParaRPr/>
+          </a:p>
         </p:txBody>
       </p:sp>
       <p:sp>
@@ -9533,7 +9515,10 @@
         </p:spPr>
         <p:txBody>
           <a:bodyPr/>
-          <a:p/>
+          <a:lstStyle/>
+          <a:p>
+            <a:endParaRPr/>
+          </a:p>
         </p:txBody>
       </p:sp>
       <p:sp>
@@ -9557,7 +9542,7 @@
           <a:bodyPr wrap="square" lIns="0" tIns="0" rIns="0" bIns="0" rtlCol="0" anchor="ctr"/>
           <a:lstStyle/>
           <a:p>
-            <a:pPr algn="ctr" indent="0" marL="0">
+            <a:pPr marL="0" indent="0" algn="ctr">
               <a:buNone/>
             </a:pPr>
             <a:r>
@@ -9595,7 +9580,7 @@
           </a:bodyPr>
           <a:lstStyle/>
           <a:p>
-            <a:pPr algn="ctr" indent="0" marL="0">
+            <a:pPr marL="0" indent="0" algn="ctr">
               <a:buNone/>
             </a:pPr>
             <a:r>
@@ -9638,7 +9623,10 @@
         </p:spPr>
         <p:txBody>
           <a:bodyPr/>
-          <a:p/>
+          <a:lstStyle/>
+          <a:p>
+            <a:endParaRPr/>
+          </a:p>
         </p:txBody>
       </p:sp>
       <p:sp>
@@ -9669,7 +9657,10 @@
         </p:spPr>
         <p:txBody>
           <a:bodyPr/>
-          <a:p/>
+          <a:lstStyle/>
+          <a:p>
+            <a:endParaRPr/>
+          </a:p>
         </p:txBody>
       </p:sp>
       <p:sp>
@@ -9695,7 +9686,7 @@
           </a:bodyPr>
           <a:lstStyle/>
           <a:p>
-            <a:pPr algn="ctr" indent="0" marL="0">
+            <a:pPr marL="0" indent="0" algn="ctr">
               <a:buNone/>
             </a:pPr>
             <a:r>
@@ -9733,7 +9724,7 @@
           </a:bodyPr>
           <a:lstStyle/>
           <a:p>
-            <a:pPr indent="0" marL="0">
+            <a:pPr marL="0" indent="0">
               <a:buNone/>
             </a:pPr>
             <a:r>
@@ -9748,9 +9739,6 @@
               <a:t>{
 </a:t>
             </a:r>
-            <a:pPr indent="0" marL="0">
-              <a:buNone/>
-            </a:pPr>
             <a:r>
               <a:rPr lang="en-US" sz="850" dirty="0">
                 <a:solidFill>
@@ -9761,21 +9749,7 @@
                 <a:cs typeface="Cascadia Mono" pitchFamily="34" charset="-120"/>
               </a:rPr>
               <a:t>  ...
-</a:t>
-            </a:r>
-            <a:pPr indent="0" marL="0">
-              <a:buNone/>
-            </a:pPr>
-            <a:r>
-              <a:rPr lang="en-US" sz="850" dirty="0">
-                <a:solidFill>
-                  <a:srgbClr val="B6C2BC"/>
-                </a:solidFill>
-                <a:latin typeface="Cascadia Mono" pitchFamily="34" charset="0"/>
-                <a:ea typeface="Cascadia Mono" pitchFamily="34" charset="-122"/>
-                <a:cs typeface="Cascadia Mono" pitchFamily="34" charset="-120"/>
-              </a:rPr>
-              <a:t>}</a:t>
+}</a:t>
             </a:r>
             <a:endParaRPr lang="en-US" sz="850" dirty="0"/>
           </a:p>
@@ -9790,7 +9764,7 @@
         <p:spPr>
           <a:xfrm>
             <a:off x="6903720" y="3493008"/>
-            <a:ext cx="0" cy="-173736"/>
+            <a:ext cx="0" cy="0"/>
           </a:xfrm>
           <a:prstGeom prst="line">
             <a:avLst/>
@@ -9807,7 +9781,10 @@
         </p:spPr>
         <p:txBody>
           <a:bodyPr/>
-          <a:p/>
+          <a:lstStyle/>
+          <a:p>
+            <a:endParaRPr/>
+          </a:p>
         </p:txBody>
       </p:sp>
       <p:sp>
@@ -9838,7 +9815,10 @@
         </p:spPr>
         <p:txBody>
           <a:bodyPr/>
-          <a:p/>
+          <a:lstStyle/>
+          <a:p>
+            <a:endParaRPr/>
+          </a:p>
         </p:txBody>
       </p:sp>
       <p:sp>
@@ -9862,7 +9842,7 @@
           <a:bodyPr wrap="square" lIns="0" tIns="0" rIns="0" bIns="0" rtlCol="0" anchor="ctr"/>
           <a:lstStyle/>
           <a:p>
-            <a:pPr indent="0" marL="0">
+            <a:pPr marL="0" indent="0">
               <a:buNone/>
             </a:pPr>
             <a:r>
@@ -9903,7 +9883,10 @@
         </p:spPr>
         <p:txBody>
           <a:bodyPr/>
-          <a:p/>
+          <a:lstStyle/>
+          <a:p>
+            <a:endParaRPr/>
+          </a:p>
         </p:txBody>
       </p:sp>
       <p:sp>
@@ -9929,7 +9912,7 @@
           </a:bodyPr>
           <a:lstStyle/>
           <a:p>
-            <a:pPr algn="ctr" indent="0" marL="0">
+            <a:pPr marL="0" indent="0" algn="ctr">
               <a:buNone/>
             </a:pPr>
             <a:r>
@@ -9965,7 +9948,7 @@
           <a:bodyPr wrap="square" lIns="0" tIns="0" rIns="0" bIns="0" rtlCol="0" anchor="ctr"/>
           <a:lstStyle/>
           <a:p>
-            <a:pPr indent="0" marL="0">
+            <a:pPr marL="0" indent="0">
               <a:buNone/>
             </a:pPr>
             <a:r>
@@ -10006,7 +9989,10 @@
         </p:spPr>
         <p:txBody>
           <a:bodyPr/>
-          <a:p/>
+          <a:lstStyle/>
+          <a:p>
+            <a:endParaRPr/>
+          </a:p>
         </p:txBody>
       </p:sp>
       <p:sp>
@@ -10032,7 +10018,7 @@
           </a:bodyPr>
           <a:lstStyle/>
           <a:p>
-            <a:pPr algn="ctr" indent="0" marL="0">
+            <a:pPr marL="0" indent="0" algn="ctr">
               <a:buNone/>
             </a:pPr>
             <a:r>
@@ -10068,7 +10054,7 @@
           <a:bodyPr wrap="square" lIns="0" tIns="0" rIns="0" bIns="0" rtlCol="0" anchor="ctr"/>
           <a:lstStyle/>
           <a:p>
-            <a:pPr indent="0" marL="0">
+            <a:pPr marL="0" indent="0">
               <a:buNone/>
             </a:pPr>
             <a:r>
@@ -10109,7 +10095,10 @@
         </p:spPr>
         <p:txBody>
           <a:bodyPr/>
-          <a:p/>
+          <a:lstStyle/>
+          <a:p>
+            <a:endParaRPr/>
+          </a:p>
         </p:txBody>
       </p:sp>
       <p:sp>
@@ -10135,7 +10124,7 @@
           </a:bodyPr>
           <a:lstStyle/>
           <a:p>
-            <a:pPr algn="ctr" indent="0" marL="0">
+            <a:pPr marL="0" indent="0" algn="ctr">
               <a:buNone/>
             </a:pPr>
             <a:r>
@@ -10171,7 +10160,7 @@
           <a:bodyPr wrap="square" lIns="0" tIns="0" rIns="0" bIns="0" rtlCol="0" anchor="ctr"/>
           <a:lstStyle/>
           <a:p>
-            <a:pPr indent="0" marL="0">
+            <a:pPr marL="0" indent="0">
               <a:buNone/>
             </a:pPr>
             <a:r>
@@ -10212,7 +10201,10 @@
         </p:spPr>
         <p:txBody>
           <a:bodyPr/>
-          <a:p/>
+          <a:lstStyle/>
+          <a:p>
+            <a:endParaRPr/>
+          </a:p>
         </p:txBody>
       </p:sp>
       <p:sp>
@@ -10238,7 +10230,7 @@
           </a:bodyPr>
           <a:lstStyle/>
           <a:p>
-            <a:pPr algn="ctr" indent="0" marL="0">
+            <a:pPr marL="0" indent="0" algn="ctr">
               <a:buNone/>
             </a:pPr>
             <a:r>
@@ -10274,7 +10266,7 @@
           <a:bodyPr wrap="square" lIns="0" tIns="0" rIns="0" bIns="0" rtlCol="0" anchor="ctr"/>
           <a:lstStyle/>
           <a:p>
-            <a:pPr indent="0" marL="0">
+            <a:pPr marL="0" indent="0">
               <a:buNone/>
             </a:pPr>
             <a:r>
@@ -10317,7 +10309,10 @@
         </p:spPr>
         <p:txBody>
           <a:bodyPr/>
-          <a:p/>
+          <a:lstStyle/>
+          <a:p>
+            <a:endParaRPr/>
+          </a:p>
         </p:txBody>
       </p:sp>
       <p:sp>
@@ -10343,7 +10338,7 @@
           </a:bodyPr>
           <a:lstStyle/>
           <a:p>
-            <a:pPr algn="ctr" indent="0" marL="0">
+            <a:pPr marL="0" indent="0" algn="ctr">
               <a:buNone/>
             </a:pPr>
             <a:r>
@@ -10381,7 +10376,7 @@
           </a:bodyPr>
           <a:lstStyle/>
           <a:p>
-            <a:pPr indent="0" marL="0">
+            <a:pPr marL="0" indent="0">
               <a:buNone/>
             </a:pPr>
             <a:r>
@@ -10398,7 +10393,7 @@
       </p:sp>
       <p:sp>
         <p:nvSpPr>
-          <p:cNvPr id="25" name="Slide Number Placeholder 0"/>
+          <p:cNvPr id="57" name="Slide Number Placeholder 0"/>
           <p:cNvSpPr>
             <a:spLocks noGrp="1"/>
           </p:cNvSpPr>
@@ -10417,7 +10412,7 @@
           <a:ln/>
           <a:extLst>
             <a:ext uri="{C572A759-6A51-4108-AA02-DFA0A04FC94B}">
-              <ma14:wrappingTextBoxFlag xmlns:ma14="http://schemas.microsoft.com/office/mac/drawingml/2011/main" val="0"/>
+              <ma14:wrappingTextBoxFlag xmlns:ma14="http://schemas.microsoft.com/office/mac/drawingml/2011/main" xmlns="" val="0"/>
             </a:ext>
           </a:extLst>
         </p:spPr>
@@ -10435,7 +10430,7 @@
           <a:p>
             <a:pPr algn="l"/>
             <a:fld id="{F7021451-1387-4CA6-816F-3879F97B5CBC}" type="slidenum">
-              <a:rPr b="0" lang="en-US"/>
+              <a:rPr lang="en-US" b="0"/>
               <a:t>5</a:t>
             </a:fld>
             <a:endParaRPr lang="en-US"/>
@@ -10490,7 +10485,7 @@
           </a:bodyPr>
           <a:lstStyle/>
           <a:p>
-            <a:pPr indent="0" marL="0">
+            <a:pPr marL="0" indent="0">
               <a:buNone/>
             </a:pPr>
             <a:r>
@@ -10531,7 +10526,7 @@
           </a:bodyPr>
           <a:lstStyle/>
           <a:p>
-            <a:pPr indent="0" marL="0">
+            <a:pPr marL="0" indent="0">
               <a:buNone/>
             </a:pPr>
             <a:r>
@@ -10574,7 +10569,10 @@
         </p:spPr>
         <p:txBody>
           <a:bodyPr/>
-          <a:p/>
+          <a:lstStyle/>
+          <a:p>
+            <a:endParaRPr/>
+          </a:p>
         </p:txBody>
       </p:sp>
       <p:sp>
@@ -10605,7 +10603,10 @@
         </p:spPr>
         <p:txBody>
           <a:bodyPr/>
-          <a:p/>
+          <a:lstStyle/>
+          <a:p>
+            <a:endParaRPr/>
+          </a:p>
         </p:txBody>
       </p:sp>
       <p:sp>
@@ -10631,7 +10632,7 @@
           </a:bodyPr>
           <a:lstStyle/>
           <a:p>
-            <a:pPr algn="ctr" indent="0" marL="0">
+            <a:pPr marL="0" indent="0" algn="ctr">
               <a:buNone/>
             </a:pPr>
             <a:r>
@@ -10669,7 +10670,7 @@
           </a:bodyPr>
           <a:lstStyle/>
           <a:p>
-            <a:pPr indent="0" marL="0">
+            <a:pPr marL="0" indent="0">
               <a:buNone/>
             </a:pPr>
             <a:r>
@@ -10684,9 +10685,6 @@
               <a:t>{
 </a:t>
             </a:r>
-            <a:pPr indent="0" marL="0">
-              <a:buNone/>
-            </a:pPr>
             <a:r>
               <a:rPr lang="en-US" sz="1300" dirty="0">
                 <a:solidFill>
@@ -10699,9 +10697,6 @@
               <a:t>  orderId: "ORD-1001",
 </a:t>
             </a:r>
-            <a:pPr indent="0" marL="0">
-              <a:buNone/>
-            </a:pPr>
             <a:r>
               <a:rPr lang="en-US" sz="1300" dirty="0">
                 <a:solidFill>
@@ -10714,9 +10709,6 @@
               <a:t>  orderDate: ISODate("2026-09-15"),
 </a:t>
             </a:r>
-            <a:pPr indent="0" marL="0">
-              <a:buNone/>
-            </a:pPr>
             <a:r>
               <a:rPr lang="en-US" sz="1300" dirty="0">
                 <a:solidFill>
@@ -10729,9 +10721,6 @@
               <a:t>  status: "CONFIRMED",
 </a:t>
             </a:r>
-            <a:pPr indent="0" marL="0">
-              <a:buNone/>
-            </a:pPr>
             <a:r>
               <a:rPr lang="en-US" sz="1300" dirty="0">
                 <a:solidFill>
@@ -10742,86 +10731,24 @@
                 <a:cs typeface="Cascadia Mono" pitchFamily="34" charset="-120"/>
               </a:rPr>
               <a:t>  items: [
+    { productId: "P100", qty: 2, price: 499.50 },
+    { productId: "P200", qty: 1, price: 25.50 }
+  ],
+  shippingAddress: { city: "Chennai", country: "India" },
 </a:t>
             </a:r>
-            <a:pPr indent="0" marL="0">
-              <a:buNone/>
-            </a:pPr>
             <a:r>
               <a:rPr lang="en-US" sz="1300" dirty="0">
                 <a:solidFill>
-                  <a:srgbClr val="B6C2BC"/>
+                  <a:srgbClr val="F28C28"/>
                 </a:solidFill>
                 <a:latin typeface="Cascadia Mono" pitchFamily="34" charset="0"/>
                 <a:ea typeface="Cascadia Mono" pitchFamily="34" charset="-122"/>
                 <a:cs typeface="Cascadia Mono" pitchFamily="34" charset="-120"/>
               </a:rPr>
-              <a:t>    { productId: "P100", qty: 2, price: 499.50 },
-</a:t>
-            </a:r>
-            <a:pPr indent="0" marL="0">
-              <a:buNone/>
-            </a:pPr>
-            <a:r>
-              <a:rPr lang="en-US" sz="1300" dirty="0">
-                <a:solidFill>
-                  <a:srgbClr val="B6C2BC"/>
-                </a:solidFill>
-                <a:latin typeface="Cascadia Mono" pitchFamily="34" charset="0"/>
-                <a:ea typeface="Cascadia Mono" pitchFamily="34" charset="-122"/>
-                <a:cs typeface="Cascadia Mono" pitchFamily="34" charset="-120"/>
-              </a:rPr>
-              <a:t>    { productId: "P200", qty: 1, price: 25.50 }
-</a:t>
-            </a:r>
-            <a:pPr indent="0" marL="0">
-              <a:buNone/>
-            </a:pPr>
-            <a:r>
-              <a:rPr lang="en-US" sz="1300" dirty="0">
-                <a:solidFill>
-                  <a:srgbClr val="B6C2BC"/>
-                </a:solidFill>
-                <a:latin typeface="Cascadia Mono" pitchFamily="34" charset="0"/>
-                <a:ea typeface="Cascadia Mono" pitchFamily="34" charset="-122"/>
-                <a:cs typeface="Cascadia Mono" pitchFamily="34" charset="-120"/>
-              </a:rPr>
-              <a:t>  ],
-</a:t>
-            </a:r>
-            <a:pPr indent="0" marL="0">
-              <a:buNone/>
-            </a:pPr>
-            <a:r>
-              <a:rPr lang="en-US" sz="1300" dirty="0">
-                <a:solidFill>
-                  <a:srgbClr val="B6C2BC"/>
-                </a:solidFill>
-                <a:latin typeface="Cascadia Mono" pitchFamily="34" charset="0"/>
-                <a:ea typeface="Cascadia Mono" pitchFamily="34" charset="-122"/>
-                <a:cs typeface="Cascadia Mono" pitchFamily="34" charset="-120"/>
-              </a:rPr>
-              <a:t>  shippingAddress: { city: "Chennai", country: "India" },
-</a:t>
-            </a:r>
-            <a:pPr indent="0" marL="0">
-              <a:buNone/>
-            </a:pPr>
-            <a:r>
-              <a:rPr lang="en-US" sz="1300" dirty="0">
-                <a:solidFill>
-                  <a:srgbClr val="F28C28"/>
-                </a:solidFill>
-                <a:latin typeface="Cascadia Mono" pitchFamily="34" charset="0"/>
-                <a:ea typeface="Cascadia Mono" pitchFamily="34" charset="-122"/>
-                <a:cs typeface="Cascadia Mono" pitchFamily="34" charset="-120"/>
-              </a:rPr>
               <a:t>  payment: { method: "CARD", status: "AUTHORIZED" }
 </a:t>
             </a:r>
-            <a:pPr indent="0" marL="0">
-              <a:buNone/>
-            </a:pPr>
             <a:r>
               <a:rPr lang="en-US" sz="1300" dirty="0">
                 <a:solidFill>
@@ -10865,7 +10792,10 @@
         </p:spPr>
         <p:txBody>
           <a:bodyPr/>
-          <a:p/>
+          <a:lstStyle/>
+          <a:p>
+            <a:endParaRPr/>
+          </a:p>
         </p:txBody>
       </p:sp>
       <p:sp>
@@ -10891,7 +10821,7 @@
           </a:bodyPr>
           <a:lstStyle/>
           <a:p>
-            <a:pPr algn="ctr" indent="0" marL="0">
+            <a:pPr marL="0" indent="0" algn="ctr">
               <a:buNone/>
             </a:pPr>
             <a:r>
@@ -10934,7 +10864,10 @@
         </p:spPr>
         <p:txBody>
           <a:bodyPr/>
-          <a:p/>
+          <a:lstStyle/>
+          <a:p>
+            <a:endParaRPr/>
+          </a:p>
         </p:txBody>
       </p:sp>
       <p:sp>
@@ -10960,7 +10893,7 @@
           </a:bodyPr>
           <a:lstStyle/>
           <a:p>
-            <a:pPr algn="ctr" indent="0" marL="0">
+            <a:pPr marL="0" indent="0" algn="ctr">
               <a:buNone/>
             </a:pPr>
             <a:r>
@@ -11003,7 +10936,10 @@
         </p:spPr>
         <p:txBody>
           <a:bodyPr/>
-          <a:p/>
+          <a:lstStyle/>
+          <a:p>
+            <a:endParaRPr/>
+          </a:p>
         </p:txBody>
       </p:sp>
       <p:sp>
@@ -11029,7 +10965,7 @@
           </a:bodyPr>
           <a:lstStyle/>
           <a:p>
-            <a:pPr algn="ctr" indent="0" marL="0">
+            <a:pPr marL="0" indent="0" algn="ctr">
               <a:buNone/>
             </a:pPr>
             <a:r>
@@ -11072,7 +11008,10 @@
         </p:spPr>
         <p:txBody>
           <a:bodyPr/>
-          <a:p/>
+          <a:lstStyle/>
+          <a:p>
+            <a:endParaRPr/>
+          </a:p>
         </p:txBody>
       </p:sp>
       <p:sp>
@@ -11101,7 +11040,10 @@
         </p:spPr>
         <p:txBody>
           <a:bodyPr/>
-          <a:p/>
+          <a:lstStyle/>
+          <a:p>
+            <a:endParaRPr/>
+          </a:p>
         </p:txBody>
       </p:sp>
       <p:sp>
@@ -11128,7 +11070,10 @@
         </p:spPr>
         <p:txBody>
           <a:bodyPr/>
-          <a:p/>
+          <a:lstStyle/>
+          <a:p>
+            <a:endParaRPr/>
+          </a:p>
         </p:txBody>
       </p:sp>
       <p:sp>
@@ -11155,7 +11100,10 @@
         </p:spPr>
         <p:txBody>
           <a:bodyPr/>
-          <a:p/>
+          <a:lstStyle/>
+          <a:p>
+            <a:endParaRPr/>
+          </a:p>
         </p:txBody>
       </p:sp>
       <p:sp>
@@ -11182,7 +11130,10 @@
         </p:spPr>
         <p:txBody>
           <a:bodyPr/>
-          <a:p/>
+          <a:lstStyle/>
+          <a:p>
+            <a:endParaRPr/>
+          </a:p>
         </p:txBody>
       </p:sp>
       <p:sp>
@@ -11206,7 +11157,7 @@
           <a:bodyPr wrap="square" lIns="0" tIns="0" rIns="0" bIns="0" rtlCol="0" anchor="ctr"/>
           <a:lstStyle/>
           <a:p>
-            <a:pPr indent="0" marL="0">
+            <a:pPr marL="0" indent="0">
               <a:buNone/>
             </a:pPr>
             <a:r>
@@ -11247,7 +11198,10 @@
         </p:spPr>
         <p:txBody>
           <a:bodyPr/>
-          <a:p/>
+          <a:lstStyle/>
+          <a:p>
+            <a:endParaRPr/>
+          </a:p>
         </p:txBody>
       </p:sp>
       <p:sp>
@@ -11273,7 +11227,7 @@
           </a:bodyPr>
           <a:lstStyle/>
           <a:p>
-            <a:pPr algn="ctr" indent="0" marL="0">
+            <a:pPr marL="0" indent="0" algn="ctr">
               <a:buNone/>
             </a:pPr>
             <a:r>
@@ -11311,7 +11265,7 @@
           </a:bodyPr>
           <a:lstStyle/>
           <a:p>
-            <a:pPr indent="0" marL="0">
+            <a:pPr marL="0" indent="0">
               <a:buNone/>
             </a:pPr>
             <a:r>
@@ -11352,7 +11306,10 @@
         </p:spPr>
         <p:txBody>
           <a:bodyPr/>
-          <a:p/>
+          <a:lstStyle/>
+          <a:p>
+            <a:endParaRPr/>
+          </a:p>
         </p:txBody>
       </p:sp>
       <p:sp>
@@ -11378,7 +11335,7 @@
           </a:bodyPr>
           <a:lstStyle/>
           <a:p>
-            <a:pPr algn="ctr" indent="0" marL="0">
+            <a:pPr marL="0" indent="0" algn="ctr">
               <a:buNone/>
             </a:pPr>
             <a:r>
@@ -11416,7 +11373,7 @@
           </a:bodyPr>
           <a:lstStyle/>
           <a:p>
-            <a:pPr indent="0" marL="0">
+            <a:pPr marL="0" indent="0">
               <a:buNone/>
             </a:pPr>
             <a:r>
@@ -11457,7 +11414,10 @@
         </p:spPr>
         <p:txBody>
           <a:bodyPr/>
-          <a:p/>
+          <a:lstStyle/>
+          <a:p>
+            <a:endParaRPr/>
+          </a:p>
         </p:txBody>
       </p:sp>
       <p:sp>
@@ -11483,7 +11443,7 @@
           </a:bodyPr>
           <a:lstStyle/>
           <a:p>
-            <a:pPr algn="ctr" indent="0" marL="0">
+            <a:pPr marL="0" indent="0" algn="ctr">
               <a:buNone/>
             </a:pPr>
             <a:r>
@@ -11521,7 +11481,7 @@
           </a:bodyPr>
           <a:lstStyle/>
           <a:p>
-            <a:pPr indent="0" marL="0">
+            <a:pPr marL="0" indent="0">
               <a:buNone/>
             </a:pPr>
             <a:r>
@@ -11562,7 +11522,10 @@
         </p:spPr>
         <p:txBody>
           <a:bodyPr/>
-          <a:p/>
+          <a:lstStyle/>
+          <a:p>
+            <a:endParaRPr/>
+          </a:p>
         </p:txBody>
       </p:sp>
       <p:sp>
@@ -11588,7 +11551,7 @@
           </a:bodyPr>
           <a:lstStyle/>
           <a:p>
-            <a:pPr algn="ctr" indent="0" marL="0">
+            <a:pPr marL="0" indent="0" algn="ctr">
               <a:buNone/>
             </a:pPr>
             <a:r>
@@ -11626,7 +11589,7 @@
           </a:bodyPr>
           <a:lstStyle/>
           <a:p>
-            <a:pPr indent="0" marL="0">
+            <a:pPr marL="0" indent="0">
               <a:buNone/>
             </a:pPr>
             <a:r>
@@ -11669,7 +11632,10 @@
         </p:spPr>
         <p:txBody>
           <a:bodyPr/>
-          <a:p/>
+          <a:lstStyle/>
+          <a:p>
+            <a:endParaRPr/>
+          </a:p>
         </p:txBody>
       </p:sp>
       <p:sp>
@@ -11695,7 +11661,7 @@
           </a:bodyPr>
           <a:lstStyle/>
           <a:p>
-            <a:pPr algn="ctr" indent="0" marL="0">
+            <a:pPr marL="0" indent="0" algn="ctr">
               <a:buNone/>
             </a:pPr>
             <a:r>
@@ -11733,7 +11699,7 @@
           </a:bodyPr>
           <a:lstStyle/>
           <a:p>
-            <a:pPr indent="0" marL="0">
+            <a:pPr marL="0" indent="0">
               <a:buNone/>
             </a:pPr>
             <a:r>
@@ -11750,7 +11716,7 @@
       </p:sp>
       <p:sp>
         <p:nvSpPr>
-          <p:cNvPr id="25" name="Slide Number Placeholder 0"/>
+          <p:cNvPr id="35" name="Slide Number Placeholder 0"/>
           <p:cNvSpPr>
             <a:spLocks noGrp="1"/>
           </p:cNvSpPr>
@@ -11769,7 +11735,7 @@
           <a:ln/>
           <a:extLst>
             <a:ext uri="{C572A759-6A51-4108-AA02-DFA0A04FC94B}">
-              <ma14:wrappingTextBoxFlag xmlns:ma14="http://schemas.microsoft.com/office/mac/drawingml/2011/main" val="0"/>
+              <ma14:wrappingTextBoxFlag xmlns:ma14="http://schemas.microsoft.com/office/mac/drawingml/2011/main" xmlns="" val="0"/>
             </a:ext>
           </a:extLst>
         </p:spPr>
@@ -11787,7 +11753,7 @@
           <a:p>
             <a:pPr algn="l"/>
             <a:fld id="{F7021451-1387-4CA6-816F-3879F97B5CBC}" type="slidenum">
-              <a:rPr b="0" lang="en-US"/>
+              <a:rPr lang="en-US" b="0"/>
               <a:t>6</a:t>
             </a:fld>
             <a:endParaRPr lang="en-US"/>
@@ -11842,7 +11808,7 @@
           </a:bodyPr>
           <a:lstStyle/>
           <a:p>
-            <a:pPr indent="0" marL="0">
+            <a:pPr marL="0" indent="0">
               <a:buNone/>
             </a:pPr>
             <a:r>
@@ -11883,7 +11849,7 @@
           </a:bodyPr>
           <a:lstStyle/>
           <a:p>
-            <a:pPr indent="0" marL="0">
+            <a:pPr marL="0" indent="0">
               <a:buNone/>
             </a:pPr>
             <a:r>
@@ -11926,7 +11892,10 @@
         </p:spPr>
         <p:txBody>
           <a:bodyPr/>
-          <a:p/>
+          <a:lstStyle/>
+          <a:p>
+            <a:endParaRPr/>
+          </a:p>
         </p:txBody>
       </p:sp>
       <p:sp>
@@ -11957,7 +11926,10 @@
         </p:spPr>
         <p:txBody>
           <a:bodyPr/>
-          <a:p/>
+          <a:lstStyle/>
+          <a:p>
+            <a:endParaRPr/>
+          </a:p>
         </p:txBody>
       </p:sp>
       <p:sp>
@@ -11983,7 +11955,7 @@
           </a:bodyPr>
           <a:lstStyle/>
           <a:p>
-            <a:pPr algn="ctr" indent="0" marL="0">
+            <a:pPr marL="0" indent="0" algn="ctr">
               <a:buNone/>
             </a:pPr>
             <a:r>
@@ -12026,7 +11998,10 @@
         </p:spPr>
         <p:txBody>
           <a:bodyPr/>
-          <a:p/>
+          <a:lstStyle/>
+          <a:p>
+            <a:endParaRPr/>
+          </a:p>
         </p:txBody>
       </p:sp>
       <p:sp>
@@ -12055,7 +12030,10 @@
         </p:spPr>
         <p:txBody>
           <a:bodyPr/>
-          <a:p/>
+          <a:lstStyle/>
+          <a:p>
+            <a:endParaRPr/>
+          </a:p>
         </p:txBody>
       </p:sp>
       <p:sp>
@@ -12084,7 +12062,10 @@
         </p:spPr>
         <p:txBody>
           <a:bodyPr/>
-          <a:p/>
+          <a:lstStyle/>
+          <a:p>
+            <a:endParaRPr/>
+          </a:p>
         </p:txBody>
       </p:sp>
       <p:sp>
@@ -12113,7 +12094,10 @@
         </p:spPr>
         <p:txBody>
           <a:bodyPr/>
-          <a:p/>
+          <a:lstStyle/>
+          <a:p>
+            <a:endParaRPr/>
+          </a:p>
         </p:txBody>
       </p:sp>
       <p:sp>
@@ -12137,7 +12121,7 @@
           <a:bodyPr wrap="square" lIns="0" tIns="0" rIns="0" bIns="0" rtlCol="0" anchor="ctr"/>
           <a:lstStyle/>
           <a:p>
-            <a:pPr algn="ctr" indent="0" marL="0">
+            <a:pPr marL="0" indent="0" algn="ctr">
               <a:buNone/>
             </a:pPr>
             <a:r>
@@ -12180,7 +12164,10 @@
         </p:spPr>
         <p:txBody>
           <a:bodyPr/>
-          <a:p/>
+          <a:lstStyle/>
+          <a:p>
+            <a:endParaRPr/>
+          </a:p>
         </p:txBody>
       </p:sp>
       <p:sp>
@@ -12209,7 +12196,10 @@
         </p:spPr>
         <p:txBody>
           <a:bodyPr/>
-          <a:p/>
+          <a:lstStyle/>
+          <a:p>
+            <a:endParaRPr/>
+          </a:p>
         </p:txBody>
       </p:sp>
       <p:sp>
@@ -12236,7 +12226,10 @@
         </p:spPr>
         <p:txBody>
           <a:bodyPr/>
-          <a:p/>
+          <a:lstStyle/>
+          <a:p>
+            <a:endParaRPr/>
+          </a:p>
         </p:txBody>
       </p:sp>
       <p:sp>
@@ -12263,7 +12256,10 @@
         </p:spPr>
         <p:txBody>
           <a:bodyPr/>
-          <a:p/>
+          <a:lstStyle/>
+          <a:p>
+            <a:endParaRPr/>
+          </a:p>
         </p:txBody>
       </p:sp>
       <p:sp>
@@ -12290,7 +12286,10 @@
         </p:spPr>
         <p:txBody>
           <a:bodyPr/>
-          <a:p/>
+          <a:lstStyle/>
+          <a:p>
+            <a:endParaRPr/>
+          </a:p>
         </p:txBody>
       </p:sp>
       <p:sp>
@@ -12314,7 +12313,7 @@
           <a:bodyPr wrap="square" lIns="0" tIns="0" rIns="0" bIns="0" rtlCol="0" anchor="ctr"/>
           <a:lstStyle/>
           <a:p>
-            <a:pPr algn="ctr" indent="0" marL="0">
+            <a:pPr marL="0" indent="0" algn="ctr">
               <a:buNone/>
             </a:pPr>
             <a:r>
@@ -12357,7 +12356,10 @@
         </p:spPr>
         <p:txBody>
           <a:bodyPr/>
-          <a:p/>
+          <a:lstStyle/>
+          <a:p>
+            <a:endParaRPr/>
+          </a:p>
         </p:txBody>
       </p:sp>
       <p:sp>
@@ -12386,7 +12388,10 @@
         </p:spPr>
         <p:txBody>
           <a:bodyPr/>
-          <a:p/>
+          <a:lstStyle/>
+          <a:p>
+            <a:endParaRPr/>
+          </a:p>
         </p:txBody>
       </p:sp>
       <p:sp>
@@ -12413,7 +12418,10 @@
         </p:spPr>
         <p:txBody>
           <a:bodyPr/>
-          <a:p/>
+          <a:lstStyle/>
+          <a:p>
+            <a:endParaRPr/>
+          </a:p>
         </p:txBody>
       </p:sp>
       <p:sp>
@@ -12440,7 +12448,10 @@
         </p:spPr>
         <p:txBody>
           <a:bodyPr/>
-          <a:p/>
+          <a:lstStyle/>
+          <a:p>
+            <a:endParaRPr/>
+          </a:p>
         </p:txBody>
       </p:sp>
       <p:sp>
@@ -12467,7 +12478,10 @@
         </p:spPr>
         <p:txBody>
           <a:bodyPr/>
-          <a:p/>
+          <a:lstStyle/>
+          <a:p>
+            <a:endParaRPr/>
+          </a:p>
         </p:txBody>
       </p:sp>
       <p:sp>
@@ -12491,7 +12505,7 @@
           <a:bodyPr wrap="square" lIns="0" tIns="0" rIns="0" bIns="0" rtlCol="0" anchor="ctr"/>
           <a:lstStyle/>
           <a:p>
-            <a:pPr algn="ctr" indent="0" marL="0">
+            <a:pPr marL="0" indent="0" algn="ctr">
               <a:buNone/>
             </a:pPr>
             <a:r>
@@ -12534,7 +12548,10 @@
         </p:spPr>
         <p:txBody>
           <a:bodyPr/>
-          <a:p/>
+          <a:lstStyle/>
+          <a:p>
+            <a:endParaRPr/>
+          </a:p>
         </p:txBody>
       </p:sp>
       <p:sp>
@@ -12563,7 +12580,10 @@
         </p:spPr>
         <p:txBody>
           <a:bodyPr/>
-          <a:p/>
+          <a:lstStyle/>
+          <a:p>
+            <a:endParaRPr/>
+          </a:p>
         </p:txBody>
       </p:sp>
       <p:sp>
@@ -12590,7 +12610,10 @@
         </p:spPr>
         <p:txBody>
           <a:bodyPr/>
-          <a:p/>
+          <a:lstStyle/>
+          <a:p>
+            <a:endParaRPr/>
+          </a:p>
         </p:txBody>
       </p:sp>
       <p:sp>
@@ -12617,7 +12640,10 @@
         </p:spPr>
         <p:txBody>
           <a:bodyPr/>
-          <a:p/>
+          <a:lstStyle/>
+          <a:p>
+            <a:endParaRPr/>
+          </a:p>
         </p:txBody>
       </p:sp>
       <p:sp>
@@ -12644,7 +12670,10 @@
         </p:spPr>
         <p:txBody>
           <a:bodyPr/>
-          <a:p/>
+          <a:lstStyle/>
+          <a:p>
+            <a:endParaRPr/>
+          </a:p>
         </p:txBody>
       </p:sp>
       <p:sp>
@@ -12668,7 +12697,7 @@
           <a:bodyPr wrap="square" lIns="0" tIns="0" rIns="0" bIns="0" rtlCol="0" anchor="ctr"/>
           <a:lstStyle/>
           <a:p>
-            <a:pPr algn="ctr" indent="0" marL="0">
+            <a:pPr marL="0" indent="0" algn="ctr">
               <a:buNone/>
             </a:pPr>
             <a:r>
@@ -12692,7 +12721,7 @@
         <p:spPr>
           <a:xfrm>
             <a:off x="6126480" y="2999232"/>
-            <a:ext cx="-4023360" cy="329184"/>
+            <a:ext cx="0" cy="329184"/>
           </a:xfrm>
           <a:prstGeom prst="line">
             <a:avLst/>
@@ -12709,7 +12738,10 @@
         </p:spPr>
         <p:txBody>
           <a:bodyPr/>
-          <a:p/>
+          <a:lstStyle/>
+          <a:p>
+            <a:endParaRPr/>
+          </a:p>
         </p:txBody>
       </p:sp>
       <p:sp>
@@ -12721,7 +12753,7 @@
         <p:spPr>
           <a:xfrm>
             <a:off x="6126480" y="2999232"/>
-            <a:ext cx="-749808" cy="329184"/>
+            <a:ext cx="0" cy="329184"/>
           </a:xfrm>
           <a:prstGeom prst="line">
             <a:avLst/>
@@ -12738,7 +12770,10 @@
         </p:spPr>
         <p:txBody>
           <a:bodyPr/>
-          <a:p/>
+          <a:lstStyle/>
+          <a:p>
+            <a:endParaRPr/>
+          </a:p>
         </p:txBody>
       </p:sp>
       <p:sp>
@@ -12767,7 +12802,10 @@
         </p:spPr>
         <p:txBody>
           <a:bodyPr/>
-          <a:p/>
+          <a:lstStyle/>
+          <a:p>
+            <a:endParaRPr/>
+          </a:p>
         </p:txBody>
       </p:sp>
       <p:sp>
@@ -12798,7 +12836,10 @@
         </p:spPr>
         <p:txBody>
           <a:bodyPr/>
-          <a:p/>
+          <a:lstStyle/>
+          <a:p>
+            <a:endParaRPr/>
+          </a:p>
         </p:txBody>
       </p:sp>
       <p:sp>
@@ -12829,7 +12870,10 @@
         </p:spPr>
         <p:txBody>
           <a:bodyPr/>
-          <a:p/>
+          <a:lstStyle/>
+          <a:p>
+            <a:endParaRPr/>
+          </a:p>
         </p:txBody>
       </p:sp>
       <p:sp>
@@ -12855,7 +12899,7 @@
           </a:bodyPr>
           <a:lstStyle/>
           <a:p>
-            <a:pPr algn="ctr" indent="0" marL="0">
+            <a:pPr marL="0" indent="0" algn="ctr">
               <a:buNone/>
             </a:pPr>
             <a:r>
@@ -12893,7 +12937,7 @@
           </a:bodyPr>
           <a:lstStyle/>
           <a:p>
-            <a:pPr indent="0" marL="0">
+            <a:pPr marL="0" indent="0">
               <a:buNone/>
             </a:pPr>
             <a:r>
@@ -12908,9 +12952,6 @@
               <a:t>{
 </a:t>
             </a:r>
-            <a:pPr indent="0" marL="0">
-              <a:buNone/>
-            </a:pPr>
             <a:r>
               <a:rPr lang="en-US" sz="850" dirty="0">
                 <a:solidFill>
@@ -12921,36 +12962,8 @@
                 <a:cs typeface="Cascadia Mono" pitchFamily="34" charset="-120"/>
               </a:rPr>
               <a:t>  fields,
-</a:t>
-            </a:r>
-            <a:pPr indent="0" marL="0">
-              <a:buNone/>
-            </a:pPr>
-            <a:r>
-              <a:rPr lang="en-US" sz="850" dirty="0">
-                <a:solidFill>
-                  <a:srgbClr val="B6C2BC"/>
-                </a:solidFill>
-                <a:latin typeface="Cascadia Mono" pitchFamily="34" charset="0"/>
-                <a:ea typeface="Cascadia Mono" pitchFamily="34" charset="-122"/>
-                <a:cs typeface="Cascadia Mono" pitchFamily="34" charset="-120"/>
-              </a:rPr>
-              <a:t>  ...
-</a:t>
-            </a:r>
-            <a:pPr indent="0" marL="0">
-              <a:buNone/>
-            </a:pPr>
-            <a:r>
-              <a:rPr lang="en-US" sz="850" dirty="0">
-                <a:solidFill>
-                  <a:srgbClr val="B6C2BC"/>
-                </a:solidFill>
-                <a:latin typeface="Cascadia Mono" pitchFamily="34" charset="0"/>
-                <a:ea typeface="Cascadia Mono" pitchFamily="34" charset="-122"/>
-                <a:cs typeface="Cascadia Mono" pitchFamily="34" charset="-120"/>
-              </a:rPr>
-              <a:t>}</a:t>
+  ...
+}</a:t>
             </a:r>
             <a:endParaRPr lang="en-US" sz="850" dirty="0"/>
           </a:p>
@@ -12982,7 +12995,10 @@
         </p:spPr>
         <p:txBody>
           <a:bodyPr/>
-          <a:p/>
+          <a:lstStyle/>
+          <a:p>
+            <a:endParaRPr/>
+          </a:p>
         </p:txBody>
       </p:sp>
       <p:sp>
@@ -13013,7 +13029,10 @@
         </p:spPr>
         <p:txBody>
           <a:bodyPr/>
-          <a:p/>
+          <a:lstStyle/>
+          <a:p>
+            <a:endParaRPr/>
+          </a:p>
         </p:txBody>
       </p:sp>
       <p:sp>
@@ -13044,7 +13063,10 @@
         </p:spPr>
         <p:txBody>
           <a:bodyPr/>
-          <a:p/>
+          <a:lstStyle/>
+          <a:p>
+            <a:endParaRPr/>
+          </a:p>
         </p:txBody>
       </p:sp>
       <p:sp>
@@ -13070,7 +13092,7 @@
           </a:bodyPr>
           <a:lstStyle/>
           <a:p>
-            <a:pPr algn="ctr" indent="0" marL="0">
+            <a:pPr marL="0" indent="0" algn="ctr">
               <a:buNone/>
             </a:pPr>
             <a:r>
@@ -13108,7 +13130,7 @@
           </a:bodyPr>
           <a:lstStyle/>
           <a:p>
-            <a:pPr indent="0" marL="0">
+            <a:pPr marL="0" indent="0">
               <a:buNone/>
             </a:pPr>
             <a:r>
@@ -13123,9 +13145,6 @@
               <a:t>{
 </a:t>
             </a:r>
-            <a:pPr indent="0" marL="0">
-              <a:buNone/>
-            </a:pPr>
             <a:r>
               <a:rPr lang="en-US" sz="850" dirty="0">
                 <a:solidFill>
@@ -13136,36 +13155,8 @@
                 <a:cs typeface="Cascadia Mono" pitchFamily="34" charset="-120"/>
               </a:rPr>
               <a:t>  fields,
-</a:t>
-            </a:r>
-            <a:pPr indent="0" marL="0">
-              <a:buNone/>
-            </a:pPr>
-            <a:r>
-              <a:rPr lang="en-US" sz="850" dirty="0">
-                <a:solidFill>
-                  <a:srgbClr val="B6C2BC"/>
-                </a:solidFill>
-                <a:latin typeface="Cascadia Mono" pitchFamily="34" charset="0"/>
-                <a:ea typeface="Cascadia Mono" pitchFamily="34" charset="-122"/>
-                <a:cs typeface="Cascadia Mono" pitchFamily="34" charset="-120"/>
-              </a:rPr>
-              <a:t>  ...
-</a:t>
-            </a:r>
-            <a:pPr indent="0" marL="0">
-              <a:buNone/>
-            </a:pPr>
-            <a:r>
-              <a:rPr lang="en-US" sz="850" dirty="0">
-                <a:solidFill>
-                  <a:srgbClr val="B6C2BC"/>
-                </a:solidFill>
-                <a:latin typeface="Cascadia Mono" pitchFamily="34" charset="0"/>
-                <a:ea typeface="Cascadia Mono" pitchFamily="34" charset="-122"/>
-                <a:cs typeface="Cascadia Mono" pitchFamily="34" charset="-120"/>
-              </a:rPr>
-              <a:t>}</a:t>
+  ...
+}</a:t>
             </a:r>
             <a:endParaRPr lang="en-US" sz="850" dirty="0"/>
           </a:p>
@@ -13197,7 +13188,10 @@
         </p:spPr>
         <p:txBody>
           <a:bodyPr/>
-          <a:p/>
+          <a:lstStyle/>
+          <a:p>
+            <a:endParaRPr/>
+          </a:p>
         </p:txBody>
       </p:sp>
       <p:sp>
@@ -13228,7 +13222,10 @@
         </p:spPr>
         <p:txBody>
           <a:bodyPr/>
-          <a:p/>
+          <a:lstStyle/>
+          <a:p>
+            <a:endParaRPr/>
+          </a:p>
         </p:txBody>
       </p:sp>
       <p:sp>
@@ -13259,7 +13256,10 @@
         </p:spPr>
         <p:txBody>
           <a:bodyPr/>
-          <a:p/>
+          <a:lstStyle/>
+          <a:p>
+            <a:endParaRPr/>
+          </a:p>
         </p:txBody>
       </p:sp>
       <p:sp>
@@ -13285,7 +13285,7 @@
           </a:bodyPr>
           <a:lstStyle/>
           <a:p>
-            <a:pPr algn="ctr" indent="0" marL="0">
+            <a:pPr marL="0" indent="0" algn="ctr">
               <a:buNone/>
             </a:pPr>
             <a:r>
@@ -13323,7 +13323,7 @@
           </a:bodyPr>
           <a:lstStyle/>
           <a:p>
-            <a:pPr indent="0" marL="0">
+            <a:pPr marL="0" indent="0">
               <a:buNone/>
             </a:pPr>
             <a:r>
@@ -13338,9 +13338,6 @@
               <a:t>{
 </a:t>
             </a:r>
-            <a:pPr indent="0" marL="0">
-              <a:buNone/>
-            </a:pPr>
             <a:r>
               <a:rPr lang="en-US" sz="850" dirty="0">
                 <a:solidFill>
@@ -13351,36 +13348,8 @@
                 <a:cs typeface="Cascadia Mono" pitchFamily="34" charset="-120"/>
               </a:rPr>
               <a:t>  fields,
-</a:t>
-            </a:r>
-            <a:pPr indent="0" marL="0">
-              <a:buNone/>
-            </a:pPr>
-            <a:r>
-              <a:rPr lang="en-US" sz="850" dirty="0">
-                <a:solidFill>
-                  <a:srgbClr val="B6C2BC"/>
-                </a:solidFill>
-                <a:latin typeface="Cascadia Mono" pitchFamily="34" charset="0"/>
-                <a:ea typeface="Cascadia Mono" pitchFamily="34" charset="-122"/>
-                <a:cs typeface="Cascadia Mono" pitchFamily="34" charset="-120"/>
-              </a:rPr>
-              <a:t>  ...
-</a:t>
-            </a:r>
-            <a:pPr indent="0" marL="0">
-              <a:buNone/>
-            </a:pPr>
-            <a:r>
-              <a:rPr lang="en-US" sz="850" dirty="0">
-                <a:solidFill>
-                  <a:srgbClr val="B6C2BC"/>
-                </a:solidFill>
-                <a:latin typeface="Cascadia Mono" pitchFamily="34" charset="0"/>
-                <a:ea typeface="Cascadia Mono" pitchFamily="34" charset="-122"/>
-                <a:cs typeface="Cascadia Mono" pitchFamily="34" charset="-120"/>
-              </a:rPr>
-              <a:t>}</a:t>
+  ...
+}</a:t>
             </a:r>
             <a:endParaRPr lang="en-US" sz="850" dirty="0"/>
           </a:p>
@@ -13412,7 +13381,10 @@
         </p:spPr>
         <p:txBody>
           <a:bodyPr/>
-          <a:p/>
+          <a:lstStyle/>
+          <a:p>
+            <a:endParaRPr/>
+          </a:p>
         </p:txBody>
       </p:sp>
       <p:sp>
@@ -13436,7 +13408,7 @@
           <a:bodyPr wrap="square" lIns="0" tIns="0" rIns="0" bIns="0" rtlCol="0" anchor="ctr"/>
           <a:lstStyle/>
           <a:p>
-            <a:pPr algn="ctr" indent="0" marL="0">
+            <a:pPr marL="0" indent="0" algn="ctr">
               <a:buNone/>
             </a:pPr>
             <a:r>
@@ -13474,7 +13446,7 @@
           </a:bodyPr>
           <a:lstStyle/>
           <a:p>
-            <a:pPr indent="0" marL="0">
+            <a:pPr marL="0" indent="0">
               <a:buNone/>
             </a:pPr>
             <a:r>
@@ -13491,7 +13463,7 @@
       </p:sp>
       <p:sp>
         <p:nvSpPr>
-          <p:cNvPr id="25" name="Slide Number Placeholder 0"/>
+          <p:cNvPr id="50" name="Slide Number Placeholder 0"/>
           <p:cNvSpPr>
             <a:spLocks noGrp="1"/>
           </p:cNvSpPr>
@@ -13510,7 +13482,7 @@
           <a:ln/>
           <a:extLst>
             <a:ext uri="{C572A759-6A51-4108-AA02-DFA0A04FC94B}">
-              <ma14:wrappingTextBoxFlag xmlns:ma14="http://schemas.microsoft.com/office/mac/drawingml/2011/main" val="0"/>
+              <ma14:wrappingTextBoxFlag xmlns:ma14="http://schemas.microsoft.com/office/mac/drawingml/2011/main" xmlns="" val="0"/>
             </a:ext>
           </a:extLst>
         </p:spPr>
@@ -13528,7 +13500,7 @@
           <a:p>
             <a:pPr algn="l"/>
             <a:fld id="{F7021451-1387-4CA6-816F-3879F97B5CBC}" type="slidenum">
-              <a:rPr b="0" lang="en-US"/>
+              <a:rPr lang="en-US" b="0"/>
               <a:t>7</a:t>
             </a:fld>
             <a:endParaRPr lang="en-US"/>
@@ -13583,7 +13555,7 @@
           </a:bodyPr>
           <a:lstStyle/>
           <a:p>
-            <a:pPr indent="0" marL="0">
+            <a:pPr marL="0" indent="0">
               <a:buNone/>
             </a:pPr>
             <a:r>
@@ -13624,7 +13596,7 @@
           </a:bodyPr>
           <a:lstStyle/>
           <a:p>
-            <a:pPr indent="0" marL="0">
+            <a:pPr marL="0" indent="0">
               <a:buNone/>
             </a:pPr>
             <a:r>
@@ -13667,7 +13639,10 @@
         </p:spPr>
         <p:txBody>
           <a:bodyPr/>
-          <a:p/>
+          <a:lstStyle/>
+          <a:p>
+            <a:endParaRPr/>
+          </a:p>
         </p:txBody>
       </p:sp>
       <p:sp>
@@ -13698,7 +13673,10 @@
         </p:spPr>
         <p:txBody>
           <a:bodyPr/>
-          <a:p/>
+          <a:lstStyle/>
+          <a:p>
+            <a:endParaRPr/>
+          </a:p>
         </p:txBody>
       </p:sp>
       <p:sp>
@@ -13724,7 +13702,7 @@
           </a:bodyPr>
           <a:lstStyle/>
           <a:p>
-            <a:pPr indent="0" marL="0">
+            <a:pPr marL="0" indent="0">
               <a:buNone/>
             </a:pPr>
             <a:r>
@@ -13762,7 +13740,7 @@
           </a:bodyPr>
           <a:lstStyle/>
           <a:p>
-            <a:pPr indent="0" marL="0">
+            <a:pPr marL="0" indent="0">
               <a:buNone/>
             </a:pPr>
             <a:r>
@@ -13777,9 +13755,6 @@
               <a:t>// 1. switch to the application database
 </a:t>
             </a:r>
-            <a:pPr indent="0" marL="0">
-              <a:buNone/>
-            </a:pPr>
             <a:r>
               <a:rPr lang="en-US" sz="1030" dirty="0">
                 <a:solidFill>
@@ -13792,9 +13767,6 @@
               <a:t>use orderdb
 </a:t>
             </a:r>
-            <a:pPr indent="0" marL="0">
-              <a:buNone/>
-            </a:pPr>
             <a:r>
               <a:rPr lang="en-US" sz="1030" dirty="0">
                 <a:solidFill>
@@ -13807,9 +13779,6 @@
               <a:t>[object Object]
 </a:t>
             </a:r>
-            <a:pPr indent="0" marL="0">
-              <a:buNone/>
-            </a:pPr>
             <a:r>
               <a:rPr lang="en-US" sz="1030" dirty="0">
                 <a:solidFill>
@@ -13822,9 +13791,6 @@
               <a:t>// 2. create collections explicitly
 </a:t>
             </a:r>
-            <a:pPr indent="0" marL="0">
-              <a:buNone/>
-            </a:pPr>
             <a:r>
               <a:rPr lang="en-US" sz="1030" dirty="0">
                 <a:solidFill>
@@ -13837,9 +13803,6 @@
               <a:t>db.createCollection("orders")
 </a:t>
             </a:r>
-            <a:pPr indent="0" marL="0">
-              <a:buNone/>
-            </a:pPr>
             <a:r>
               <a:rPr lang="en-US" sz="1030" dirty="0">
                 <a:solidFill>
@@ -13852,9 +13815,6 @@
               <a:t>db.createCollection("products")
 </a:t>
             </a:r>
-            <a:pPr indent="0" marL="0">
-              <a:buNone/>
-            </a:pPr>
             <a:r>
               <a:rPr lang="en-US" sz="1030" dirty="0">
                 <a:solidFill>
@@ -13867,9 +13827,6 @@
               <a:t>[object Object]
 </a:t>
             </a:r>
-            <a:pPr indent="0" marL="0">
-              <a:buNone/>
-            </a:pPr>
             <a:r>
               <a:rPr lang="en-US" sz="1030" dirty="0">
                 <a:solidFill>
@@ -13882,9 +13839,6 @@
               <a:t>// 3. insert one document
 </a:t>
             </a:r>
-            <a:pPr indent="0" marL="0">
-              <a:buNone/>
-            </a:pPr>
             <a:r>
               <a:rPr lang="en-US" sz="1030" dirty="0">
                 <a:solidFill>
@@ -13897,9 +13851,6 @@
               <a:t>db.orders.insertOne({
 </a:t>
             </a:r>
-            <a:pPr indent="0" marL="0">
-              <a:buNone/>
-            </a:pPr>
             <a:r>
               <a:rPr lang="en-US" sz="1030" dirty="0">
                 <a:solidFill>
@@ -13912,9 +13863,6 @@
               <a:t>  orderId: "ORD-1001",
 </a:t>
             </a:r>
-            <a:pPr indent="0" marL="0">
-              <a:buNone/>
-            </a:pPr>
             <a:r>
               <a:rPr lang="en-US" sz="1030" dirty="0">
                 <a:solidFill>
@@ -13927,9 +13875,6 @@
               <a:t>  status: "PLACED"
 </a:t>
             </a:r>
-            <a:pPr indent="0" marL="0">
-              <a:buNone/>
-            </a:pPr>
             <a:r>
               <a:rPr lang="en-US" sz="1030" dirty="0">
                 <a:solidFill>
@@ -13942,9 +13887,6 @@
               <a:t>})
 </a:t>
             </a:r>
-            <a:pPr indent="0" marL="0">
-              <a:buNone/>
-            </a:pPr>
             <a:r>
               <a:rPr lang="en-US" sz="1030" dirty="0">
                 <a:solidFill>
@@ -13957,9 +13899,6 @@
               <a:t>[object Object]
 </a:t>
             </a:r>
-            <a:pPr indent="0" marL="0">
-              <a:buNone/>
-            </a:pPr>
             <a:r>
               <a:rPr lang="en-US" sz="1030" dirty="0">
                 <a:solidFill>
@@ -13972,9 +13911,6 @@
               <a:t>// 4. inspect the data
 </a:t>
             </a:r>
-            <a:pPr indent="0" marL="0">
-              <a:buNone/>
-            </a:pPr>
             <a:r>
               <a:rPr lang="en-US" sz="1030" dirty="0">
                 <a:solidFill>
@@ -13987,9 +13923,6 @@
               <a:t>show collections
 </a:t>
             </a:r>
-            <a:pPr indent="0" marL="0">
-              <a:buNone/>
-            </a:pPr>
             <a:r>
               <a:rPr lang="en-US" sz="1030" dirty="0">
                 <a:solidFill>
@@ -14033,7 +13966,10 @@
         </p:spPr>
         <p:txBody>
           <a:bodyPr/>
-          <a:p/>
+          <a:lstStyle/>
+          <a:p>
+            <a:endParaRPr/>
+          </a:p>
         </p:txBody>
       </p:sp>
       <p:sp>
@@ -14062,7 +13998,10 @@
         </p:spPr>
         <p:txBody>
           <a:bodyPr/>
-          <a:p/>
+          <a:lstStyle/>
+          <a:p>
+            <a:endParaRPr/>
+          </a:p>
         </p:txBody>
       </p:sp>
       <p:sp>
@@ -14088,7 +14027,7 @@
           </a:bodyPr>
           <a:lstStyle/>
           <a:p>
-            <a:pPr algn="ctr" indent="0" marL="0">
+            <a:pPr marL="0" indent="0" algn="ctr">
               <a:buNone/>
             </a:pPr>
             <a:r>
@@ -14124,7 +14063,7 @@
           <a:bodyPr wrap="square" lIns="0" tIns="0" rIns="0" bIns="0" rtlCol="0" anchor="ctr"/>
           <a:lstStyle/>
           <a:p>
-            <a:pPr indent="0" marL="0">
+            <a:pPr marL="0" indent="0">
               <a:buNone/>
             </a:pPr>
             <a:r>
@@ -14165,7 +14104,10 @@
         </p:spPr>
         <p:txBody>
           <a:bodyPr/>
-          <a:p/>
+          <a:lstStyle/>
+          <a:p>
+            <a:endParaRPr/>
+          </a:p>
         </p:txBody>
       </p:sp>
       <p:sp>
@@ -14194,7 +14136,10 @@
         </p:spPr>
         <p:txBody>
           <a:bodyPr/>
-          <a:p/>
+          <a:lstStyle/>
+          <a:p>
+            <a:endParaRPr/>
+          </a:p>
         </p:txBody>
       </p:sp>
       <p:sp>
@@ -14220,7 +14165,7 @@
           </a:bodyPr>
           <a:lstStyle/>
           <a:p>
-            <a:pPr algn="ctr" indent="0" marL="0">
+            <a:pPr marL="0" indent="0" algn="ctr">
               <a:buNone/>
             </a:pPr>
             <a:r>
@@ -14256,7 +14201,7 @@
           <a:bodyPr wrap="square" lIns="0" tIns="0" rIns="0" bIns="0" rtlCol="0" anchor="ctr"/>
           <a:lstStyle/>
           <a:p>
-            <a:pPr indent="0" marL="0">
+            <a:pPr marL="0" indent="0">
               <a:buNone/>
             </a:pPr>
             <a:r>
@@ -14297,7 +14242,10 @@
         </p:spPr>
         <p:txBody>
           <a:bodyPr/>
-          <a:p/>
+          <a:lstStyle/>
+          <a:p>
+            <a:endParaRPr/>
+          </a:p>
         </p:txBody>
       </p:sp>
       <p:sp>
@@ -14326,7 +14274,10 @@
         </p:spPr>
         <p:txBody>
           <a:bodyPr/>
-          <a:p/>
+          <a:lstStyle/>
+          <a:p>
+            <a:endParaRPr/>
+          </a:p>
         </p:txBody>
       </p:sp>
       <p:sp>
@@ -14352,7 +14303,7 @@
           </a:bodyPr>
           <a:lstStyle/>
           <a:p>
-            <a:pPr algn="ctr" indent="0" marL="0">
+            <a:pPr marL="0" indent="0" algn="ctr">
               <a:buNone/>
             </a:pPr>
             <a:r>
@@ -14388,7 +14339,7 @@
           <a:bodyPr wrap="square" lIns="0" tIns="0" rIns="0" bIns="0" rtlCol="0" anchor="ctr"/>
           <a:lstStyle/>
           <a:p>
-            <a:pPr indent="0" marL="0">
+            <a:pPr marL="0" indent="0">
               <a:buNone/>
             </a:pPr>
             <a:r>
@@ -14429,7 +14380,10 @@
         </p:spPr>
         <p:txBody>
           <a:bodyPr/>
-          <a:p/>
+          <a:lstStyle/>
+          <a:p>
+            <a:endParaRPr/>
+          </a:p>
         </p:txBody>
       </p:sp>
       <p:sp>
@@ -14458,7 +14412,10 @@
         </p:spPr>
         <p:txBody>
           <a:bodyPr/>
-          <a:p/>
+          <a:lstStyle/>
+          <a:p>
+            <a:endParaRPr/>
+          </a:p>
         </p:txBody>
       </p:sp>
       <p:sp>
@@ -14484,7 +14441,7 @@
           </a:bodyPr>
           <a:lstStyle/>
           <a:p>
-            <a:pPr algn="ctr" indent="0" marL="0">
+            <a:pPr marL="0" indent="0" algn="ctr">
               <a:buNone/>
             </a:pPr>
             <a:r>
@@ -14520,7 +14477,7 @@
           <a:bodyPr wrap="square" lIns="0" tIns="0" rIns="0" bIns="0" rtlCol="0" anchor="ctr"/>
           <a:lstStyle/>
           <a:p>
-            <a:pPr indent="0" marL="0">
+            <a:pPr marL="0" indent="0">
               <a:buNone/>
             </a:pPr>
             <a:r>
@@ -14563,7 +14520,10 @@
         </p:spPr>
         <p:txBody>
           <a:bodyPr/>
-          <a:p/>
+          <a:lstStyle/>
+          <a:p>
+            <a:endParaRPr/>
+          </a:p>
         </p:txBody>
       </p:sp>
       <p:sp>
@@ -14589,7 +14549,7 @@
           </a:bodyPr>
           <a:lstStyle/>
           <a:p>
-            <a:pPr algn="ctr" indent="0" marL="0">
+            <a:pPr marL="0" indent="0" algn="ctr">
               <a:buNone/>
             </a:pPr>
             <a:r>
@@ -14627,7 +14587,7 @@
           </a:bodyPr>
           <a:lstStyle/>
           <a:p>
-            <a:pPr indent="0" marL="0">
+            <a:pPr marL="0" indent="0">
               <a:buNone/>
             </a:pPr>
             <a:r>
@@ -14644,7 +14604,7 @@
       </p:sp>
       <p:sp>
         <p:nvSpPr>
-          <p:cNvPr id="25" name="Slide Number Placeholder 0"/>
+          <p:cNvPr id="27" name="Slide Number Placeholder 0"/>
           <p:cNvSpPr>
             <a:spLocks noGrp="1"/>
           </p:cNvSpPr>
@@ -14663,7 +14623,7 @@
           <a:ln/>
           <a:extLst>
             <a:ext uri="{C572A759-6A51-4108-AA02-DFA0A04FC94B}">
-              <ma14:wrappingTextBoxFlag xmlns:ma14="http://schemas.microsoft.com/office/mac/drawingml/2011/main" val="0"/>
+              <ma14:wrappingTextBoxFlag xmlns:ma14="http://schemas.microsoft.com/office/mac/drawingml/2011/main" xmlns="" val="0"/>
             </a:ext>
           </a:extLst>
         </p:spPr>
@@ -14681,7 +14641,7 @@
           <a:p>
             <a:pPr algn="l"/>
             <a:fld id="{F7021451-1387-4CA6-816F-3879F97B5CBC}" type="slidenum">
-              <a:rPr b="0" lang="en-US"/>
+              <a:rPr lang="en-US" b="0"/>
               <a:t>8</a:t>
             </a:fld>
             <a:endParaRPr lang="en-US"/>
@@ -14736,7 +14696,7 @@
           </a:bodyPr>
           <a:lstStyle/>
           <a:p>
-            <a:pPr indent="0" marL="0">
+            <a:pPr marL="0" indent="0">
               <a:buNone/>
             </a:pPr>
             <a:r>
@@ -14777,7 +14737,7 @@
           </a:bodyPr>
           <a:lstStyle/>
           <a:p>
-            <a:pPr indent="0" marL="0">
+            <a:pPr marL="0" indent="0">
               <a:buNone/>
             </a:pPr>
             <a:r>
@@ -14820,7 +14780,10 @@
         </p:spPr>
         <p:txBody>
           <a:bodyPr/>
-          <a:p/>
+          <a:lstStyle/>
+          <a:p>
+            <a:endParaRPr/>
+          </a:p>
         </p:txBody>
       </p:sp>
       <p:sp>
@@ -14849,7 +14812,10 @@
         </p:spPr>
         <p:txBody>
           <a:bodyPr/>
-          <a:p/>
+          <a:lstStyle/>
+          <a:p>
+            <a:endParaRPr/>
+          </a:p>
         </p:txBody>
       </p:sp>
       <p:sp>
@@ -14876,7 +14842,10 @@
         </p:spPr>
         <p:txBody>
           <a:bodyPr/>
-          <a:p/>
+          <a:lstStyle/>
+          <a:p>
+            <a:endParaRPr/>
+          </a:p>
         </p:txBody>
       </p:sp>
       <p:sp>
@@ -14903,7 +14872,10 @@
         </p:spPr>
         <p:txBody>
           <a:bodyPr/>
-          <a:p/>
+          <a:lstStyle/>
+          <a:p>
+            <a:endParaRPr/>
+          </a:p>
         </p:txBody>
       </p:sp>
       <p:sp>
@@ -14930,7 +14902,10 @@
         </p:spPr>
         <p:txBody>
           <a:bodyPr/>
-          <a:p/>
+          <a:lstStyle/>
+          <a:p>
+            <a:endParaRPr/>
+          </a:p>
         </p:txBody>
       </p:sp>
       <p:sp>
@@ -14954,7 +14929,7 @@
           <a:bodyPr wrap="square" lIns="0" tIns="0" rIns="0" bIns="0" rtlCol="0" anchor="ctr"/>
           <a:lstStyle/>
           <a:p>
-            <a:pPr indent="0" marL="0">
+            <a:pPr marL="0" indent="0">
               <a:buNone/>
             </a:pPr>
             <a:r>
@@ -14997,7 +14972,10 @@
         </p:spPr>
         <p:txBody>
           <a:bodyPr/>
-          <a:p/>
+          <a:lstStyle/>
+          <a:p>
+            <a:endParaRPr/>
+          </a:p>
         </p:txBody>
       </p:sp>
       <p:sp>
@@ -15028,7 +15006,10 @@
         </p:spPr>
         <p:txBody>
           <a:bodyPr/>
-          <a:p/>
+          <a:lstStyle/>
+          <a:p>
+            <a:endParaRPr/>
+          </a:p>
         </p:txBody>
       </p:sp>
       <p:sp>
@@ -15054,7 +15035,7 @@
           </a:bodyPr>
           <a:lstStyle/>
           <a:p>
-            <a:pPr algn="ctr" indent="0" marL="0">
+            <a:pPr marL="0" indent="0" algn="ctr">
               <a:buNone/>
             </a:pPr>
             <a:r>
@@ -15092,7 +15073,7 @@
           </a:bodyPr>
           <a:lstStyle/>
           <a:p>
-            <a:pPr indent="0" marL="0">
+            <a:pPr marL="0" indent="0">
               <a:buNone/>
             </a:pPr>
             <a:r>
@@ -15107,9 +15088,6 @@
               <a:t>{
 </a:t>
             </a:r>
-            <a:pPr indent="0" marL="0">
-              <a:buNone/>
-            </a:pPr>
             <a:r>
               <a:rPr lang="en-US" sz="850" dirty="0">
                 <a:solidFill>
@@ -15120,66 +15098,10 @@
                 <a:cs typeface="Cascadia Mono" pitchFamily="34" charset="-120"/>
               </a:rPr>
               <a:t> orderId: "ORD-1001",
-</a:t>
-            </a:r>
-            <a:pPr indent="0" marL="0">
-              <a:buNone/>
-            </a:pPr>
-            <a:r>
-              <a:rPr lang="en-US" sz="850" dirty="0">
-                <a:solidFill>
-                  <a:srgbClr val="B6C2BC"/>
-                </a:solidFill>
-                <a:latin typeface="Cascadia Mono" pitchFamily="34" charset="0"/>
-                <a:ea typeface="Cascadia Mono" pitchFamily="34" charset="-122"/>
-                <a:cs typeface="Cascadia Mono" pitchFamily="34" charset="-120"/>
-              </a:rPr>
-              <a:t> status: "PLACED",
-</a:t>
-            </a:r>
-            <a:pPr indent="0" marL="0">
-              <a:buNone/>
-            </a:pPr>
-            <a:r>
-              <a:rPr lang="en-US" sz="850" dirty="0">
-                <a:solidFill>
-                  <a:srgbClr val="B6C2BC"/>
-                </a:solidFill>
-                <a:latin typeface="Cascadia Mono" pitchFamily="34" charset="0"/>
-                <a:ea typeface="Cascadia Mono" pitchFamily="34" charset="-122"/>
-                <a:cs typeface="Cascadia Mono" pitchFamily="34" charset="-120"/>
-              </a:rPr>
-              <a:t> items: [ ... ],
-</a:t>
-            </a:r>
-            <a:pPr indent="0" marL="0">
-              <a:buNone/>
-            </a:pPr>
-            <a:r>
-              <a:rPr lang="en-US" sz="850" dirty="0">
-                <a:solidFill>
-                  <a:srgbClr val="B6C2BC"/>
-                </a:solidFill>
-                <a:latin typeface="Cascadia Mono" pitchFamily="34" charset="0"/>
-                <a:ea typeface="Cascadia Mono" pitchFamily="34" charset="-122"/>
-                <a:cs typeface="Cascadia Mono" pitchFamily="34" charset="-120"/>
-              </a:rPr>
-              <a:t> shippingAddress: { ... }
-</a:t>
-            </a:r>
-            <a:pPr indent="0" marL="0">
-              <a:buNone/>
-            </a:pPr>
-            <a:r>
-              <a:rPr lang="en-US" sz="850" dirty="0">
-                <a:solidFill>
-                  <a:srgbClr val="B6C2BC"/>
-                </a:solidFill>
-                <a:latin typeface="Cascadia Mono" pitchFamily="34" charset="0"/>
-                <a:ea typeface="Cascadia Mono" pitchFamily="34" charset="-122"/>
-                <a:cs typeface="Cascadia Mono" pitchFamily="34" charset="-120"/>
-              </a:rPr>
-              <a:t>}</a:t>
+ status: "PLACED",
+ items: [ ... ],
+ shippingAddress: { ... }
+}</a:t>
             </a:r>
             <a:endParaRPr lang="en-US" sz="850" dirty="0"/>
           </a:p>
@@ -15213,7 +15135,10 @@
         </p:spPr>
         <p:txBody>
           <a:bodyPr/>
-          <a:p/>
+          <a:lstStyle/>
+          <a:p>
+            <a:endParaRPr/>
+          </a:p>
         </p:txBody>
       </p:sp>
       <p:sp>
@@ -15239,7 +15164,7 @@
           </a:bodyPr>
           <a:lstStyle/>
           <a:p>
-            <a:pPr algn="ctr" indent="0" marL="0">
+            <a:pPr marL="0" indent="0" algn="ctr">
               <a:buNone/>
             </a:pPr>
             <a:r>
@@ -15282,7 +15207,10 @@
         </p:spPr>
         <p:txBody>
           <a:bodyPr/>
-          <a:p/>
+          <a:lstStyle/>
+          <a:p>
+            <a:endParaRPr/>
+          </a:p>
         </p:txBody>
       </p:sp>
       <p:sp>
@@ -15313,7 +15241,10 @@
         </p:spPr>
         <p:txBody>
           <a:bodyPr/>
-          <a:p/>
+          <a:lstStyle/>
+          <a:p>
+            <a:endParaRPr/>
+          </a:p>
         </p:txBody>
       </p:sp>
       <p:sp>
@@ -15339,7 +15270,7 @@
           </a:bodyPr>
           <a:lstStyle/>
           <a:p>
-            <a:pPr indent="0" marL="0">
+            <a:pPr marL="0" indent="0">
               <a:buNone/>
             </a:pPr>
             <a:r>
@@ -15377,7 +15308,7 @@
           </a:bodyPr>
           <a:lstStyle/>
           <a:p>
-            <a:pPr indent="0" marL="0">
+            <a:pPr marL="0" indent="0">
               <a:buNone/>
             </a:pPr>
             <a:r>
@@ -15392,9 +15323,6 @@
               <a:t>// exact lookup
 </a:t>
             </a:r>
-            <a:pPr indent="0" marL="0">
-              <a:buNone/>
-            </a:pPr>
             <a:r>
               <a:rPr lang="en-US" sz="1030" dirty="0">
                 <a:solidFill>
@@ -15407,9 +15335,6 @@
               <a:t>db.orders.findOne({
 </a:t>
             </a:r>
-            <a:pPr indent="0" marL="0">
-              <a:buNone/>
-            </a:pPr>
             <a:r>
               <a:rPr lang="en-US" sz="1030" dirty="0">
                 <a:solidFill>
@@ -15422,9 +15347,6 @@
               <a:t>  orderId: "ORD-1001"
 </a:t>
             </a:r>
-            <a:pPr indent="0" marL="0">
-              <a:buNone/>
-            </a:pPr>
             <a:r>
               <a:rPr lang="en-US" sz="1030" dirty="0">
                 <a:solidFill>
@@ -15437,9 +15359,6 @@
               <a:t>})
 </a:t>
             </a:r>
-            <a:pPr indent="0" marL="0">
-              <a:buNone/>
-            </a:pPr>
             <a:r>
               <a:rPr lang="en-US" sz="1030" dirty="0">
                 <a:solidFill>
@@ -15452,9 +15371,6 @@
               <a:t>[object Object]
 </a:t>
             </a:r>
-            <a:pPr indent="0" marL="0">
-              <a:buNone/>
-            </a:pPr>
             <a:r>
               <a:rPr lang="en-US" sz="1030" dirty="0">
                 <a:solidFill>
@@ -15467,9 +15383,6 @@
               <a:t>// inspect matching orders
 </a:t>
             </a:r>
-            <a:pPr indent="0" marL="0">
-              <a:buNone/>
-            </a:pPr>
             <a:r>
               <a:rPr lang="en-US" sz="1030" dirty="0">
                 <a:solidFill>
@@ -15513,7 +15426,10 @@
         </p:spPr>
         <p:txBody>
           <a:bodyPr/>
-          <a:p/>
+          <a:lstStyle/>
+          <a:p>
+            <a:endParaRPr/>
+          </a:p>
         </p:txBody>
       </p:sp>
       <p:sp>
@@ -15537,7 +15453,7 @@
           <a:bodyPr wrap="square" lIns="0" tIns="0" rIns="0" bIns="0" rtlCol="0" anchor="ctr"/>
           <a:lstStyle/>
           <a:p>
-            <a:pPr indent="0" marL="0">
+            <a:pPr marL="0" indent="0">
               <a:buNone/>
             </a:pPr>
             <a:r>
@@ -15575,7 +15491,7 @@
           </a:bodyPr>
           <a:lstStyle/>
           <a:p>
-            <a:pPr indent="0" marL="0">
+            <a:pPr marL="0" indent="0">
               <a:buNone/>
             </a:pPr>
             <a:r>
@@ -15613,7 +15529,7 @@
           </a:bodyPr>
           <a:lstStyle/>
           <a:p>
-            <a:pPr indent="0" marL="0">
+            <a:pPr marL="0" indent="0">
               <a:buNone/>
             </a:pPr>
             <a:r>
@@ -15649,7 +15565,7 @@
           <a:ln/>
           <a:extLst>
             <a:ext uri="{C572A759-6A51-4108-AA02-DFA0A04FC94B}">
-              <ma14:wrappingTextBoxFlag xmlns:ma14="http://schemas.microsoft.com/office/mac/drawingml/2011/main" val="0"/>
+              <ma14:wrappingTextBoxFlag xmlns:ma14="http://schemas.microsoft.com/office/mac/drawingml/2011/main" xmlns="" val="0"/>
             </a:ext>
           </a:extLst>
         </p:spPr>
@@ -15667,7 +15583,7 @@
           <a:p>
             <a:pPr algn="l"/>
             <a:fld id="{F7021451-1387-4CA6-816F-3879F97B5CBC}" type="slidenum">
-              <a:rPr b="0" lang="en-US"/>
+              <a:rPr lang="en-US" b="0"/>
               <a:t>9</a:t>
             </a:fld>
             <a:endParaRPr lang="en-US"/>
@@ -15975,4 +15891,325 @@
     </a:ext>
   </a:extLst>
 </a:theme>
+</file>
+
+<file path=ppt/theme/theme2.xml><?xml version="1.0" encoding="utf-8"?>
+<a:theme xmlns:a="http://schemas.openxmlformats.org/drawingml/2006/main" name="Office Theme">
+  <a:themeElements>
+    <a:clrScheme name="Office">
+      <a:dk1>
+        <a:sysClr val="windowText" lastClr="000000"/>
+      </a:dk1>
+      <a:lt1>
+        <a:sysClr val="window" lastClr="FFFFFF"/>
+      </a:lt1>
+      <a:dk2>
+        <a:srgbClr val="0E2841"/>
+      </a:dk2>
+      <a:lt2>
+        <a:srgbClr val="E8E8E8"/>
+      </a:lt2>
+      <a:accent1>
+        <a:srgbClr val="156082"/>
+      </a:accent1>
+      <a:accent2>
+        <a:srgbClr val="E97132"/>
+      </a:accent2>
+      <a:accent3>
+        <a:srgbClr val="196B24"/>
+      </a:accent3>
+      <a:accent4>
+        <a:srgbClr val="0F9ED5"/>
+      </a:accent4>
+      <a:accent5>
+        <a:srgbClr val="A02B93"/>
+      </a:accent5>
+      <a:accent6>
+        <a:srgbClr val="4EA72E"/>
+      </a:accent6>
+      <a:hlink>
+        <a:srgbClr val="467886"/>
+      </a:hlink>
+      <a:folHlink>
+        <a:srgbClr val="96607D"/>
+      </a:folHlink>
+    </a:clrScheme>
+    <a:fontScheme name="Office">
+      <a:majorFont>
+        <a:latin typeface="Aptos Display" panose="02110004020202020204"/>
+        <a:ea typeface=""/>
+        <a:cs typeface=""/>
+        <a:font script="Jpan" typeface="游ゴシック Light"/>
+        <a:font script="Hang" typeface="맑은 고딕"/>
+        <a:font script="Hans" typeface="等线 Light"/>
+        <a:font script="Hant" typeface="新細明體"/>
+        <a:font script="Arab" typeface="Times New Roman"/>
+        <a:font script="Hebr" typeface="Times New Roman"/>
+        <a:font script="Thai" typeface="Angsana New"/>
+        <a:font script="Ethi" typeface="Nyala"/>
+        <a:font script="Beng" typeface="Vrinda"/>
+        <a:font script="Gujr" typeface="Shruti"/>
+        <a:font script="Khmr" typeface="MoolBoran"/>
+        <a:font script="Knda" typeface="Tunga"/>
+        <a:font script="Guru" typeface="Raavi"/>
+        <a:font script="Cans" typeface="Euphemia"/>
+        <a:font script="Cher" typeface="Plantagenet Cherokee"/>
+        <a:font script="Yiii" typeface="Microsoft Yi Baiti"/>
+        <a:font script="Tibt" typeface="Microsoft Himalaya"/>
+        <a:font script="Thaa" typeface="MV Boli"/>
+        <a:font script="Deva" typeface="Mangal"/>
+        <a:font script="Telu" typeface="Gautami"/>
+        <a:font script="Taml" typeface="Latha"/>
+        <a:font script="Syrc" typeface="Estrangelo Edessa"/>
+        <a:font script="Orya" typeface="Kalinga"/>
+        <a:font script="Mlym" typeface="Kartika"/>
+        <a:font script="Laoo" typeface="DokChampa"/>
+        <a:font script="Sinh" typeface="Iskoola Pota"/>
+        <a:font script="Mong" typeface="Mongolian Baiti"/>
+        <a:font script="Viet" typeface="Times New Roman"/>
+        <a:font script="Uigh" typeface="Microsoft Uighur"/>
+        <a:font script="Geor" typeface="Sylfaen"/>
+        <a:font script="Armn" typeface="Arial"/>
+        <a:font script="Bugi" typeface="Leelawadee UI"/>
+        <a:font script="Bopo" typeface="Microsoft JhengHei"/>
+        <a:font script="Java" typeface="Javanese Text"/>
+        <a:font script="Lisu" typeface="Segoe UI"/>
+        <a:font script="Mymr" typeface="Myanmar Text"/>
+        <a:font script="Nkoo" typeface="Ebrima"/>
+        <a:font script="Olck" typeface="Nirmala UI"/>
+        <a:font script="Osma" typeface="Ebrima"/>
+        <a:font script="Phag" typeface="Phagspa"/>
+        <a:font script="Syrn" typeface="Estrangelo Edessa"/>
+        <a:font script="Syrj" typeface="Estrangelo Edessa"/>
+        <a:font script="Syre" typeface="Estrangelo Edessa"/>
+        <a:font script="Sora" typeface="Nirmala UI"/>
+        <a:font script="Tale" typeface="Microsoft Tai Le"/>
+        <a:font script="Talu" typeface="Microsoft New Tai Lue"/>
+        <a:font script="Tfng" typeface="Ebrima"/>
+      </a:majorFont>
+      <a:minorFont>
+        <a:latin typeface="Aptos" panose="02110004020202020204"/>
+        <a:ea typeface=""/>
+        <a:cs typeface=""/>
+        <a:font script="Jpan" typeface="游ゴシック"/>
+        <a:font script="Hang" typeface="맑은 고딕"/>
+        <a:font script="Hans" typeface="等线"/>
+        <a:font script="Hant" typeface="新細明體"/>
+        <a:font script="Arab" typeface="Arial"/>
+        <a:font script="Hebr" typeface="Arial"/>
+        <a:font script="Thai" typeface="Cordia New"/>
+        <a:font script="Ethi" typeface="Nyala"/>
+        <a:font script="Beng" typeface="Vrinda"/>
+        <a:font script="Gujr" typeface="Shruti"/>
+        <a:font script="Khmr" typeface="DaunPenh"/>
+        <a:font script="Knda" typeface="Tunga"/>
+        <a:font script="Guru" typeface="Raavi"/>
+        <a:font script="Cans" typeface="Euphemia"/>
+        <a:font script="Cher" typeface="Plantagenet Cherokee"/>
+        <a:font script="Yiii" typeface="Microsoft Yi Baiti"/>
+        <a:font script="Tibt" typeface="Microsoft Himalaya"/>
+        <a:font script="Thaa" typeface="MV Boli"/>
+        <a:font script="Deva" typeface="Mangal"/>
+        <a:font script="Telu" typeface="Gautami"/>
+        <a:font script="Taml" typeface="Latha"/>
+        <a:font script="Syrc" typeface="Estrangelo Edessa"/>
+        <a:font script="Orya" typeface="Kalinga"/>
+        <a:font script="Mlym" typeface="Kartika"/>
+        <a:font script="Laoo" typeface="DokChampa"/>
+        <a:font script="Sinh" typeface="Iskoola Pota"/>
+        <a:font script="Mong" typeface="Mongolian Baiti"/>
+        <a:font script="Viet" typeface="Arial"/>
+        <a:font script="Uigh" typeface="Microsoft Uighur"/>
+        <a:font script="Geor" typeface="Sylfaen"/>
+        <a:font script="Armn" typeface="Arial"/>
+        <a:font script="Bugi" typeface="Leelawadee UI"/>
+        <a:font script="Bopo" typeface="Microsoft JhengHei"/>
+        <a:font script="Java" typeface="Javanese Text"/>
+        <a:font script="Lisu" typeface="Segoe UI"/>
+        <a:font script="Mymr" typeface="Myanmar Text"/>
+        <a:font script="Nkoo" typeface="Ebrima"/>
+        <a:font script="Olck" typeface="Nirmala UI"/>
+        <a:font script="Osma" typeface="Ebrima"/>
+        <a:font script="Phag" typeface="Phagspa"/>
+        <a:font script="Syrn" typeface="Estrangelo Edessa"/>
+        <a:font script="Syrj" typeface="Estrangelo Edessa"/>
+        <a:font script="Syre" typeface="Estrangelo Edessa"/>
+        <a:font script="Sora" typeface="Nirmala UI"/>
+        <a:font script="Tale" typeface="Microsoft Tai Le"/>
+        <a:font script="Talu" typeface="Microsoft New Tai Lue"/>
+        <a:font script="Tfng" typeface="Ebrima"/>
+      </a:minorFont>
+    </a:fontScheme>
+    <a:fmtScheme name="Office">
+      <a:fillStyleLst>
+        <a:solidFill>
+          <a:schemeClr val="phClr"/>
+        </a:solidFill>
+        <a:gradFill rotWithShape="1">
+          <a:gsLst>
+            <a:gs pos="0">
+              <a:schemeClr val="phClr">
+                <a:lumMod val="110000"/>
+                <a:satMod val="105000"/>
+                <a:tint val="67000"/>
+              </a:schemeClr>
+            </a:gs>
+            <a:gs pos="50000">
+              <a:schemeClr val="phClr">
+                <a:lumMod val="105000"/>
+                <a:satMod val="103000"/>
+                <a:tint val="73000"/>
+              </a:schemeClr>
+            </a:gs>
+            <a:gs pos="100000">
+              <a:schemeClr val="phClr">
+                <a:lumMod val="105000"/>
+                <a:satMod val="109000"/>
+                <a:tint val="81000"/>
+              </a:schemeClr>
+            </a:gs>
+          </a:gsLst>
+          <a:lin ang="5400000" scaled="0"/>
+        </a:gradFill>
+        <a:gradFill rotWithShape="1">
+          <a:gsLst>
+            <a:gs pos="0">
+              <a:schemeClr val="phClr">
+                <a:satMod val="103000"/>
+                <a:lumMod val="102000"/>
+                <a:tint val="94000"/>
+              </a:schemeClr>
+            </a:gs>
+            <a:gs pos="50000">
+              <a:schemeClr val="phClr">
+                <a:satMod val="110000"/>
+                <a:lumMod val="100000"/>
+                <a:shade val="100000"/>
+              </a:schemeClr>
+            </a:gs>
+            <a:gs pos="100000">
+              <a:schemeClr val="phClr">
+                <a:lumMod val="99000"/>
+                <a:satMod val="120000"/>
+                <a:shade val="78000"/>
+              </a:schemeClr>
+            </a:gs>
+          </a:gsLst>
+          <a:lin ang="5400000" scaled="0"/>
+        </a:gradFill>
+      </a:fillStyleLst>
+      <a:lnStyleLst>
+        <a:ln w="12700" cap="flat" cmpd="sng" algn="ctr">
+          <a:solidFill>
+            <a:schemeClr val="phClr"/>
+          </a:solidFill>
+          <a:prstDash val="solid"/>
+          <a:miter lim="800000"/>
+        </a:ln>
+        <a:ln w="19050" cap="flat" cmpd="sng" algn="ctr">
+          <a:solidFill>
+            <a:schemeClr val="phClr"/>
+          </a:solidFill>
+          <a:prstDash val="solid"/>
+          <a:miter lim="800000"/>
+        </a:ln>
+        <a:ln w="25400" cap="flat" cmpd="sng" algn="ctr">
+          <a:solidFill>
+            <a:schemeClr val="phClr"/>
+          </a:solidFill>
+          <a:prstDash val="solid"/>
+          <a:miter lim="800000"/>
+        </a:ln>
+      </a:lnStyleLst>
+      <a:effectStyleLst>
+        <a:effectStyle>
+          <a:effectLst/>
+        </a:effectStyle>
+        <a:effectStyle>
+          <a:effectLst/>
+        </a:effectStyle>
+        <a:effectStyle>
+          <a:effectLst>
+            <a:outerShdw blurRad="57150" dist="19050" dir="5400000" algn="ctr" rotWithShape="0">
+              <a:srgbClr val="000000">
+                <a:alpha val="63000"/>
+              </a:srgbClr>
+            </a:outerShdw>
+          </a:effectLst>
+        </a:effectStyle>
+      </a:effectStyleLst>
+      <a:bgFillStyleLst>
+        <a:solidFill>
+          <a:schemeClr val="phClr"/>
+        </a:solidFill>
+        <a:solidFill>
+          <a:schemeClr val="phClr">
+            <a:tint val="95000"/>
+            <a:satMod val="170000"/>
+          </a:schemeClr>
+        </a:solidFill>
+        <a:gradFill rotWithShape="1">
+          <a:gsLst>
+            <a:gs pos="0">
+              <a:schemeClr val="phClr">
+                <a:tint val="93000"/>
+                <a:satMod val="150000"/>
+                <a:shade val="98000"/>
+                <a:lumMod val="102000"/>
+              </a:schemeClr>
+            </a:gs>
+            <a:gs pos="50000">
+              <a:schemeClr val="phClr">
+                <a:tint val="98000"/>
+                <a:satMod val="130000"/>
+                <a:shade val="90000"/>
+                <a:lumMod val="103000"/>
+              </a:schemeClr>
+            </a:gs>
+            <a:gs pos="100000">
+              <a:schemeClr val="phClr">
+                <a:shade val="63000"/>
+                <a:satMod val="120000"/>
+              </a:schemeClr>
+            </a:gs>
+          </a:gsLst>
+          <a:lin ang="5400000" scaled="0"/>
+        </a:gradFill>
+      </a:bgFillStyleLst>
+    </a:fmtScheme>
+  </a:themeElements>
+  <a:objectDefaults>
+    <a:lnDef>
+      <a:spPr/>
+      <a:bodyPr/>
+      <a:lstStyle/>
+      <a:style>
+        <a:lnRef idx="2">
+          <a:schemeClr val="accent1"/>
+        </a:lnRef>
+        <a:fillRef idx="0">
+          <a:schemeClr val="accent1"/>
+        </a:fillRef>
+        <a:effectRef idx="1">
+          <a:schemeClr val="accent1"/>
+        </a:effectRef>
+        <a:fontRef idx="minor">
+          <a:schemeClr val="tx1"/>
+        </a:fontRef>
+      </a:style>
+    </a:lnDef>
+  </a:objectDefaults>
+  <a:extraClrSchemeLst/>
+  <a:extLst>
+    <a:ext uri="{05A4C25C-085E-4340-85A3-A5531E510DB2}">
+      <thm15:themeFamily xmlns:thm15="http://schemas.microsoft.com/office/thememl/2012/main" name="Office Theme" id="{2E142A2C-CD16-42D6-873A-C26D2A0506FA}" vid="{1BDDFF52-6CD6-40A5-AB3C-68EB2F1E4D0A}"/>
+    </a:ext>
+  </a:extLst>
+</a:theme>
+</file>
+
+<file path=docMetadata/LabelInfo.xml><?xml version="1.0" encoding="utf-8"?>
+<clbl:labelList xmlns:clbl="http://schemas.microsoft.com/office/2020/mipLabelMetadata">
+  <clbl:label id="{0aed0b32-58fd-49a1-925b-0e19a34645b1}" enabled="1" method="Privileged" siteId="{97984c2b-a229-4609-8185-ae84947bc3fc}" contentBits="0" removed="0"/>
+</clbl:labelList>
 </file>